--- a/docs/pptx/whole/ritu-linsubhr-sens-anemia2.pptx
+++ b/docs/pptx/whole/ritu-linsubhr-sens-anemia2.pptx
@@ -2443,7 +2443,7 @@
           </p:nvSpPr>
           <p:spPr>
             <a:xfrm>
-              <a:off x="2520195" y="2073503"/>
+              <a:off x="2520043" y="2073503"/>
               <a:ext cx="0" cy="3649639"/>
             </a:xfrm>
             <a:custGeom>
@@ -2486,7 +2486,7 @@
           </p:nvSpPr>
           <p:spPr>
             <a:xfrm>
-              <a:off x="4326850" y="2073503"/>
+              <a:off x="4325074" y="2073503"/>
               <a:ext cx="0" cy="3649639"/>
             </a:xfrm>
             <a:custGeom>
@@ -2529,7 +2529,7 @@
           </p:nvSpPr>
           <p:spPr>
             <a:xfrm>
-              <a:off x="6133505" y="2073503"/>
+              <a:off x="6130105" y="2073503"/>
               <a:ext cx="0" cy="3649639"/>
             </a:xfrm>
             <a:custGeom>
@@ -2572,7 +2572,7 @@
           </p:nvSpPr>
           <p:spPr>
             <a:xfrm>
-              <a:off x="7940161" y="2073503"/>
+              <a:off x="7935136" y="2073503"/>
               <a:ext cx="0" cy="3649639"/>
             </a:xfrm>
             <a:custGeom>
@@ -2830,7 +2830,7 @@
           </p:nvSpPr>
           <p:spPr>
             <a:xfrm>
-              <a:off x="1616868" y="2073503"/>
+              <a:off x="1617528" y="2073503"/>
               <a:ext cx="0" cy="3649639"/>
             </a:xfrm>
             <a:custGeom>
@@ -2873,7 +2873,7 @@
           </p:nvSpPr>
           <p:spPr>
             <a:xfrm>
-              <a:off x="3423523" y="2073503"/>
+              <a:off x="3422559" y="2073503"/>
               <a:ext cx="0" cy="3649639"/>
             </a:xfrm>
             <a:custGeom>
@@ -2916,7 +2916,7 @@
           </p:nvSpPr>
           <p:spPr>
             <a:xfrm>
-              <a:off x="5230178" y="2073503"/>
+              <a:off x="5227590" y="2073503"/>
               <a:ext cx="0" cy="3649639"/>
             </a:xfrm>
             <a:custGeom>
@@ -2959,7 +2959,7 @@
           </p:nvSpPr>
           <p:spPr>
             <a:xfrm>
-              <a:off x="7036833" y="2073503"/>
+              <a:off x="7032620" y="2073503"/>
               <a:ext cx="0" cy="3649639"/>
             </a:xfrm>
             <a:custGeom>
@@ -3002,612 +3002,612 @@
           </p:nvSpPr>
           <p:spPr>
             <a:xfrm>
-              <a:off x="1172049" y="3704579"/>
-              <a:ext cx="7090630" cy="1541860"/>
+              <a:off x="1172049" y="3697035"/>
+              <a:ext cx="7090630" cy="1550194"/>
             </a:xfrm>
             <a:custGeom>
               <a:avLst/>
               <a:pathLst>
-                <a:path w="7090630" h="1541860">
+                <a:path w="7090630" h="1550194">
                   <a:moveTo>
                     <a:pt x="0" y="0"/>
                   </a:moveTo>
                   <a:lnTo>
-                    <a:pt x="71622" y="33108"/>
-                  </a:lnTo>
-                  <a:lnTo>
-                    <a:pt x="143245" y="65625"/>
-                  </a:lnTo>
-                  <a:lnTo>
-                    <a:pt x="214867" y="97561"/>
-                  </a:lnTo>
-                  <a:lnTo>
-                    <a:pt x="286490" y="128926"/>
-                  </a:lnTo>
-                  <a:lnTo>
-                    <a:pt x="358112" y="159730"/>
-                  </a:lnTo>
-                  <a:lnTo>
-                    <a:pt x="429735" y="189984"/>
-                  </a:lnTo>
-                  <a:lnTo>
-                    <a:pt x="501357" y="219698"/>
-                  </a:lnTo>
-                  <a:lnTo>
-                    <a:pt x="572980" y="248880"/>
-                  </a:lnTo>
-                  <a:lnTo>
-                    <a:pt x="644602" y="277541"/>
-                  </a:lnTo>
-                  <a:lnTo>
-                    <a:pt x="716225" y="305690"/>
-                  </a:lnTo>
-                  <a:lnTo>
-                    <a:pt x="787847" y="333335"/>
-                  </a:lnTo>
-                  <a:lnTo>
-                    <a:pt x="859470" y="360487"/>
-                  </a:lnTo>
-                  <a:lnTo>
-                    <a:pt x="931092" y="387153"/>
-                  </a:lnTo>
-                  <a:lnTo>
-                    <a:pt x="1002715" y="413343"/>
-                  </a:lnTo>
-                  <a:lnTo>
-                    <a:pt x="1074337" y="439065"/>
-                  </a:lnTo>
-                  <a:lnTo>
-                    <a:pt x="1145960" y="464327"/>
-                  </a:lnTo>
-                  <a:lnTo>
-                    <a:pt x="1217582" y="489138"/>
-                  </a:lnTo>
-                  <a:lnTo>
-                    <a:pt x="1289205" y="513505"/>
-                  </a:lnTo>
-                  <a:lnTo>
-                    <a:pt x="1360827" y="537437"/>
-                  </a:lnTo>
-                  <a:lnTo>
-                    <a:pt x="1432450" y="560941"/>
-                  </a:lnTo>
-                  <a:lnTo>
-                    <a:pt x="1504073" y="584025"/>
-                  </a:lnTo>
-                  <a:lnTo>
-                    <a:pt x="1575695" y="606697"/>
-                  </a:lnTo>
-                  <a:lnTo>
-                    <a:pt x="1647318" y="628963"/>
-                  </a:lnTo>
-                  <a:lnTo>
-                    <a:pt x="1718940" y="650832"/>
-                  </a:lnTo>
-                  <a:lnTo>
-                    <a:pt x="1790563" y="672309"/>
-                  </a:lnTo>
-                  <a:lnTo>
-                    <a:pt x="1862185" y="693403"/>
-                  </a:lnTo>
-                  <a:lnTo>
-                    <a:pt x="1933808" y="714120"/>
-                  </a:lnTo>
-                  <a:lnTo>
-                    <a:pt x="2005430" y="734467"/>
-                  </a:lnTo>
-                  <a:lnTo>
-                    <a:pt x="2077053" y="754450"/>
-                  </a:lnTo>
-                  <a:lnTo>
-                    <a:pt x="2148675" y="774076"/>
-                  </a:lnTo>
-                  <a:lnTo>
-                    <a:pt x="2220298" y="793351"/>
-                  </a:lnTo>
-                  <a:lnTo>
-                    <a:pt x="2291920" y="812282"/>
-                  </a:lnTo>
-                  <a:lnTo>
-                    <a:pt x="2363543" y="830875"/>
-                  </a:lnTo>
-                  <a:lnTo>
-                    <a:pt x="2435165" y="849135"/>
-                  </a:lnTo>
-                  <a:lnTo>
-                    <a:pt x="2506788" y="867069"/>
-                  </a:lnTo>
-                  <a:lnTo>
-                    <a:pt x="2578410" y="884682"/>
-                  </a:lnTo>
-                  <a:lnTo>
-                    <a:pt x="2650033" y="901981"/>
-                  </a:lnTo>
-                  <a:lnTo>
-                    <a:pt x="2721655" y="918970"/>
-                  </a:lnTo>
-                  <a:lnTo>
-                    <a:pt x="2793278" y="935656"/>
-                  </a:lnTo>
-                  <a:lnTo>
-                    <a:pt x="2864901" y="952044"/>
-                  </a:lnTo>
-                  <a:lnTo>
-                    <a:pt x="2936523" y="968139"/>
-                  </a:lnTo>
-                  <a:lnTo>
-                    <a:pt x="3008146" y="983946"/>
-                  </a:lnTo>
-                  <a:lnTo>
-                    <a:pt x="3079768" y="999471"/>
-                  </a:lnTo>
-                  <a:lnTo>
-                    <a:pt x="3151391" y="1014718"/>
-                  </a:lnTo>
-                  <a:lnTo>
-                    <a:pt x="3223013" y="1023425"/>
-                  </a:lnTo>
-                  <a:lnTo>
-                    <a:pt x="3294636" y="1023926"/>
-                  </a:lnTo>
-                  <a:lnTo>
-                    <a:pt x="3366258" y="1024427"/>
-                  </a:lnTo>
-                  <a:lnTo>
-                    <a:pt x="3437881" y="1024927"/>
-                  </a:lnTo>
-                  <a:lnTo>
-                    <a:pt x="3509503" y="1025427"/>
-                  </a:lnTo>
-                  <a:lnTo>
-                    <a:pt x="3581126" y="1025927"/>
-                  </a:lnTo>
-                  <a:lnTo>
-                    <a:pt x="3652748" y="1026426"/>
-                  </a:lnTo>
-                  <a:lnTo>
-                    <a:pt x="3724371" y="1026925"/>
-                  </a:lnTo>
-                  <a:lnTo>
-                    <a:pt x="3795993" y="1027424"/>
-                  </a:lnTo>
-                  <a:lnTo>
-                    <a:pt x="3867616" y="1027922"/>
-                  </a:lnTo>
-                  <a:lnTo>
-                    <a:pt x="3939238" y="1028420"/>
-                  </a:lnTo>
-                  <a:lnTo>
-                    <a:pt x="4010861" y="1028918"/>
-                  </a:lnTo>
-                  <a:lnTo>
-                    <a:pt x="4082483" y="1029416"/>
-                  </a:lnTo>
-                  <a:lnTo>
-                    <a:pt x="4154106" y="1029913"/>
-                  </a:lnTo>
-                  <a:lnTo>
-                    <a:pt x="4225729" y="1030410"/>
-                  </a:lnTo>
-                  <a:lnTo>
-                    <a:pt x="4297351" y="1030907"/>
-                  </a:lnTo>
-                  <a:lnTo>
-                    <a:pt x="4368974" y="1031403"/>
-                  </a:lnTo>
-                  <a:lnTo>
-                    <a:pt x="4440596" y="1031899"/>
-                  </a:lnTo>
-                  <a:lnTo>
-                    <a:pt x="4512219" y="1032395"/>
-                  </a:lnTo>
-                  <a:lnTo>
-                    <a:pt x="4583841" y="1032891"/>
-                  </a:lnTo>
-                  <a:lnTo>
-                    <a:pt x="4655464" y="1033386"/>
-                  </a:lnTo>
-                  <a:lnTo>
-                    <a:pt x="4727086" y="1033881"/>
-                  </a:lnTo>
-                  <a:lnTo>
-                    <a:pt x="4798709" y="1034375"/>
-                  </a:lnTo>
-                  <a:lnTo>
-                    <a:pt x="4870331" y="1034870"/>
-                  </a:lnTo>
-                  <a:lnTo>
-                    <a:pt x="4941954" y="1035364"/>
-                  </a:lnTo>
-                  <a:lnTo>
-                    <a:pt x="5013576" y="1035857"/>
-                  </a:lnTo>
-                  <a:lnTo>
-                    <a:pt x="5085199" y="1036351"/>
-                  </a:lnTo>
-                  <a:lnTo>
-                    <a:pt x="5156821" y="1036844"/>
-                  </a:lnTo>
-                  <a:lnTo>
-                    <a:pt x="5228444" y="1037337"/>
-                  </a:lnTo>
-                  <a:lnTo>
-                    <a:pt x="5300066" y="1037829"/>
-                  </a:lnTo>
-                  <a:lnTo>
-                    <a:pt x="5371689" y="1038321"/>
-                  </a:lnTo>
-                  <a:lnTo>
-                    <a:pt x="5443311" y="1038813"/>
-                  </a:lnTo>
-                  <a:lnTo>
-                    <a:pt x="5514934" y="1039305"/>
-                  </a:lnTo>
-                  <a:lnTo>
-                    <a:pt x="5586557" y="1039796"/>
-                  </a:lnTo>
-                  <a:lnTo>
-                    <a:pt x="5658179" y="1040287"/>
-                  </a:lnTo>
-                  <a:lnTo>
-                    <a:pt x="5729802" y="1040778"/>
-                  </a:lnTo>
-                  <a:lnTo>
-                    <a:pt x="5801424" y="1041268"/>
-                  </a:lnTo>
-                  <a:lnTo>
-                    <a:pt x="5873047" y="1041758"/>
-                  </a:lnTo>
-                  <a:lnTo>
-                    <a:pt x="5944669" y="1042248"/>
-                  </a:lnTo>
-                  <a:lnTo>
-                    <a:pt x="6016292" y="1042738"/>
-                  </a:lnTo>
-                  <a:lnTo>
-                    <a:pt x="6087914" y="1043227"/>
-                  </a:lnTo>
-                  <a:lnTo>
-                    <a:pt x="6159537" y="1043716"/>
-                  </a:lnTo>
-                  <a:lnTo>
-                    <a:pt x="6231159" y="1044205"/>
-                  </a:lnTo>
-                  <a:lnTo>
-                    <a:pt x="6302782" y="1044693"/>
-                  </a:lnTo>
-                  <a:lnTo>
-                    <a:pt x="6374404" y="1045181"/>
-                  </a:lnTo>
-                  <a:lnTo>
-                    <a:pt x="6446027" y="1045669"/>
-                  </a:lnTo>
-                  <a:lnTo>
-                    <a:pt x="6517649" y="1046156"/>
-                  </a:lnTo>
-                  <a:lnTo>
-                    <a:pt x="6589272" y="1046643"/>
-                  </a:lnTo>
-                  <a:lnTo>
-                    <a:pt x="6660894" y="1047130"/>
-                  </a:lnTo>
-                  <a:lnTo>
-                    <a:pt x="6732517" y="1047617"/>
-                  </a:lnTo>
-                  <a:lnTo>
-                    <a:pt x="6804139" y="1048103"/>
-                  </a:lnTo>
-                  <a:lnTo>
-                    <a:pt x="6875762" y="1048589"/>
-                  </a:lnTo>
-                  <a:lnTo>
-                    <a:pt x="6947385" y="1049075"/>
-                  </a:lnTo>
-                  <a:lnTo>
-                    <a:pt x="7019007" y="1049560"/>
-                  </a:lnTo>
-                  <a:lnTo>
-                    <a:pt x="7090630" y="1050045"/>
-                  </a:lnTo>
-                  <a:lnTo>
-                    <a:pt x="7090630" y="1541860"/>
-                  </a:lnTo>
-                  <a:lnTo>
-                    <a:pt x="7019007" y="1536204"/>
-                  </a:lnTo>
-                  <a:lnTo>
-                    <a:pt x="6947385" y="1530446"/>
-                  </a:lnTo>
-                  <a:lnTo>
-                    <a:pt x="6875762" y="1524583"/>
-                  </a:lnTo>
-                  <a:lnTo>
-                    <a:pt x="6804139" y="1518613"/>
-                  </a:lnTo>
-                  <a:lnTo>
-                    <a:pt x="6732517" y="1512535"/>
-                  </a:lnTo>
-                  <a:lnTo>
-                    <a:pt x="6660894" y="1506345"/>
-                  </a:lnTo>
-                  <a:lnTo>
-                    <a:pt x="6589272" y="1500044"/>
-                  </a:lnTo>
-                  <a:lnTo>
-                    <a:pt x="6517649" y="1493627"/>
-                  </a:lnTo>
-                  <a:lnTo>
-                    <a:pt x="6446027" y="1487094"/>
-                  </a:lnTo>
-                  <a:lnTo>
-                    <a:pt x="6374404" y="1480442"/>
-                  </a:lnTo>
-                  <a:lnTo>
-                    <a:pt x="6302782" y="1473669"/>
-                  </a:lnTo>
-                  <a:lnTo>
-                    <a:pt x="6231159" y="1466773"/>
-                  </a:lnTo>
-                  <a:lnTo>
-                    <a:pt x="6159537" y="1459751"/>
-                  </a:lnTo>
-                  <a:lnTo>
-                    <a:pt x="6087914" y="1452602"/>
-                  </a:lnTo>
-                  <a:lnTo>
-                    <a:pt x="6016292" y="1445322"/>
-                  </a:lnTo>
-                  <a:lnTo>
-                    <a:pt x="5944669" y="1437910"/>
-                  </a:lnTo>
-                  <a:lnTo>
-                    <a:pt x="5873047" y="1430363"/>
-                  </a:lnTo>
-                  <a:lnTo>
-                    <a:pt x="5801424" y="1422679"/>
-                  </a:lnTo>
-                  <a:lnTo>
-                    <a:pt x="5729802" y="1414855"/>
-                  </a:lnTo>
-                  <a:lnTo>
-                    <a:pt x="5658179" y="1406888"/>
-                  </a:lnTo>
-                  <a:lnTo>
-                    <a:pt x="5586557" y="1398777"/>
-                  </a:lnTo>
-                  <a:lnTo>
-                    <a:pt x="5514934" y="1390518"/>
-                  </a:lnTo>
-                  <a:lnTo>
-                    <a:pt x="5443311" y="1382109"/>
-                  </a:lnTo>
-                  <a:lnTo>
-                    <a:pt x="5371689" y="1373546"/>
-                  </a:lnTo>
-                  <a:lnTo>
-                    <a:pt x="5300066" y="1364828"/>
-                  </a:lnTo>
-                  <a:lnTo>
-                    <a:pt x="5228444" y="1355952"/>
-                  </a:lnTo>
-                  <a:lnTo>
-                    <a:pt x="5156821" y="1346913"/>
-                  </a:lnTo>
-                  <a:lnTo>
-                    <a:pt x="5085199" y="1337711"/>
-                  </a:lnTo>
-                  <a:lnTo>
-                    <a:pt x="5013576" y="1328341"/>
-                  </a:lnTo>
-                  <a:lnTo>
-                    <a:pt x="4941954" y="1318800"/>
-                  </a:lnTo>
-                  <a:lnTo>
-                    <a:pt x="4870331" y="1309086"/>
-                  </a:lnTo>
-                  <a:lnTo>
-                    <a:pt x="4798709" y="1299195"/>
-                  </a:lnTo>
-                  <a:lnTo>
-                    <a:pt x="4727086" y="1289124"/>
-                  </a:lnTo>
-                  <a:lnTo>
-                    <a:pt x="4655464" y="1278869"/>
-                  </a:lnTo>
-                  <a:lnTo>
-                    <a:pt x="4583841" y="1268429"/>
-                  </a:lnTo>
-                  <a:lnTo>
-                    <a:pt x="4512219" y="1257798"/>
-                  </a:lnTo>
-                  <a:lnTo>
-                    <a:pt x="4440596" y="1246974"/>
-                  </a:lnTo>
-                  <a:lnTo>
-                    <a:pt x="4368974" y="1235952"/>
-                  </a:lnTo>
-                  <a:lnTo>
-                    <a:pt x="4297351" y="1224731"/>
-                  </a:lnTo>
-                  <a:lnTo>
-                    <a:pt x="4225729" y="1213305"/>
-                  </a:lnTo>
-                  <a:lnTo>
-                    <a:pt x="4154106" y="1201671"/>
-                  </a:lnTo>
-                  <a:lnTo>
-                    <a:pt x="4082483" y="1189825"/>
-                  </a:lnTo>
-                  <a:lnTo>
-                    <a:pt x="4010861" y="1177764"/>
-                  </a:lnTo>
-                  <a:lnTo>
-                    <a:pt x="3939238" y="1165484"/>
-                  </a:lnTo>
-                  <a:lnTo>
-                    <a:pt x="3867616" y="1152980"/>
-                  </a:lnTo>
-                  <a:lnTo>
-                    <a:pt x="3795993" y="1140248"/>
-                  </a:lnTo>
-                  <a:lnTo>
-                    <a:pt x="3724371" y="1127285"/>
-                  </a:lnTo>
-                  <a:lnTo>
-                    <a:pt x="3652748" y="1114086"/>
-                  </a:lnTo>
-                  <a:lnTo>
-                    <a:pt x="3581126" y="1100647"/>
-                  </a:lnTo>
-                  <a:lnTo>
-                    <a:pt x="3509503" y="1086963"/>
-                  </a:lnTo>
-                  <a:lnTo>
-                    <a:pt x="3437881" y="1073031"/>
-                  </a:lnTo>
-                  <a:lnTo>
-                    <a:pt x="3366258" y="1058844"/>
-                  </a:lnTo>
-                  <a:lnTo>
-                    <a:pt x="3294636" y="1044400"/>
-                  </a:lnTo>
-                  <a:lnTo>
-                    <a:pt x="3223013" y="1029693"/>
-                  </a:lnTo>
-                  <a:lnTo>
-                    <a:pt x="3151391" y="1022924"/>
-                  </a:lnTo>
-                  <a:lnTo>
-                    <a:pt x="3079768" y="1022422"/>
-                  </a:lnTo>
-                  <a:lnTo>
-                    <a:pt x="3008146" y="1021921"/>
-                  </a:lnTo>
-                  <a:lnTo>
-                    <a:pt x="2936523" y="1021418"/>
-                  </a:lnTo>
-                  <a:lnTo>
-                    <a:pt x="2864901" y="1020916"/>
-                  </a:lnTo>
-                  <a:lnTo>
-                    <a:pt x="2793278" y="1020413"/>
-                  </a:lnTo>
-                  <a:lnTo>
-                    <a:pt x="2721655" y="1019910"/>
-                  </a:lnTo>
-                  <a:lnTo>
-                    <a:pt x="2650033" y="1019407"/>
-                  </a:lnTo>
-                  <a:lnTo>
-                    <a:pt x="2578410" y="1018903"/>
-                  </a:lnTo>
-                  <a:lnTo>
-                    <a:pt x="2506788" y="1018399"/>
-                  </a:lnTo>
-                  <a:lnTo>
-                    <a:pt x="2435165" y="1017895"/>
-                  </a:lnTo>
-                  <a:lnTo>
-                    <a:pt x="2363543" y="1017391"/>
-                  </a:lnTo>
-                  <a:lnTo>
-                    <a:pt x="2291920" y="1016886"/>
-                  </a:lnTo>
-                  <a:lnTo>
-                    <a:pt x="2220298" y="1016381"/>
-                  </a:lnTo>
-                  <a:lnTo>
-                    <a:pt x="2148675" y="1015875"/>
-                  </a:lnTo>
-                  <a:lnTo>
-                    <a:pt x="2077053" y="1015369"/>
-                  </a:lnTo>
-                  <a:lnTo>
-                    <a:pt x="2005430" y="1014863"/>
-                  </a:lnTo>
-                  <a:lnTo>
-                    <a:pt x="1933808" y="1014357"/>
-                  </a:lnTo>
-                  <a:lnTo>
-                    <a:pt x="1862185" y="1013850"/>
-                  </a:lnTo>
-                  <a:lnTo>
-                    <a:pt x="1790563" y="1013343"/>
-                  </a:lnTo>
-                  <a:lnTo>
-                    <a:pt x="1718940" y="1012836"/>
-                  </a:lnTo>
-                  <a:lnTo>
-                    <a:pt x="1647318" y="1012328"/>
-                  </a:lnTo>
-                  <a:lnTo>
-                    <a:pt x="1575695" y="1011820"/>
-                  </a:lnTo>
-                  <a:lnTo>
-                    <a:pt x="1504073" y="1011312"/>
-                  </a:lnTo>
-                  <a:lnTo>
-                    <a:pt x="1432450" y="1010804"/>
-                  </a:lnTo>
-                  <a:lnTo>
-                    <a:pt x="1360827" y="1010295"/>
-                  </a:lnTo>
-                  <a:lnTo>
-                    <a:pt x="1289205" y="1009786"/>
-                  </a:lnTo>
-                  <a:lnTo>
-                    <a:pt x="1217582" y="1009276"/>
-                  </a:lnTo>
-                  <a:lnTo>
-                    <a:pt x="1145960" y="1008766"/>
-                  </a:lnTo>
-                  <a:lnTo>
-                    <a:pt x="1074337" y="1008256"/>
-                  </a:lnTo>
-                  <a:lnTo>
-                    <a:pt x="1002715" y="1007746"/>
-                  </a:lnTo>
-                  <a:lnTo>
-                    <a:pt x="931092" y="1007235"/>
-                  </a:lnTo>
-                  <a:lnTo>
-                    <a:pt x="859470" y="1006724"/>
-                  </a:lnTo>
-                  <a:lnTo>
-                    <a:pt x="787847" y="1006213"/>
-                  </a:lnTo>
-                  <a:lnTo>
-                    <a:pt x="716225" y="1005701"/>
-                  </a:lnTo>
-                  <a:lnTo>
-                    <a:pt x="644602" y="1005189"/>
-                  </a:lnTo>
-                  <a:lnTo>
-                    <a:pt x="572980" y="1004677"/>
-                  </a:lnTo>
-                  <a:lnTo>
-                    <a:pt x="501357" y="1004165"/>
-                  </a:lnTo>
-                  <a:lnTo>
-                    <a:pt x="429735" y="1003652"/>
-                  </a:lnTo>
-                  <a:lnTo>
-                    <a:pt x="358112" y="1003139"/>
-                  </a:lnTo>
-                  <a:lnTo>
-                    <a:pt x="286490" y="1002625"/>
-                  </a:lnTo>
-                  <a:lnTo>
-                    <a:pt x="214867" y="1002111"/>
-                  </a:lnTo>
-                  <a:lnTo>
-                    <a:pt x="143245" y="1001597"/>
-                  </a:lnTo>
-                  <a:lnTo>
-                    <a:pt x="71622" y="1001083"/>
-                  </a:lnTo>
-                  <a:lnTo>
-                    <a:pt x="0" y="1000568"/>
+                    <a:pt x="71622" y="33365"/>
+                  </a:lnTo>
+                  <a:lnTo>
+                    <a:pt x="143245" y="66132"/>
+                  </a:lnTo>
+                  <a:lnTo>
+                    <a:pt x="214867" y="98311"/>
+                  </a:lnTo>
+                  <a:lnTo>
+                    <a:pt x="286490" y="129913"/>
+                  </a:lnTo>
+                  <a:lnTo>
+                    <a:pt x="358112" y="160948"/>
+                  </a:lnTo>
+                  <a:lnTo>
+                    <a:pt x="429735" y="191427"/>
+                  </a:lnTo>
+                  <a:lnTo>
+                    <a:pt x="501357" y="221359"/>
+                  </a:lnTo>
+                  <a:lnTo>
+                    <a:pt x="572980" y="250754"/>
+                  </a:lnTo>
+                  <a:lnTo>
+                    <a:pt x="644602" y="279621"/>
+                  </a:lnTo>
+                  <a:lnTo>
+                    <a:pt x="716225" y="307971"/>
+                  </a:lnTo>
+                  <a:lnTo>
+                    <a:pt x="787847" y="335813"/>
+                  </a:lnTo>
+                  <a:lnTo>
+                    <a:pt x="859470" y="363155"/>
+                  </a:lnTo>
+                  <a:lnTo>
+                    <a:pt x="931092" y="390007"/>
+                  </a:lnTo>
+                  <a:lnTo>
+                    <a:pt x="1002715" y="416377"/>
+                  </a:lnTo>
+                  <a:lnTo>
+                    <a:pt x="1074337" y="442274"/>
+                  </a:lnTo>
+                  <a:lnTo>
+                    <a:pt x="1145960" y="467706"/>
+                  </a:lnTo>
+                  <a:lnTo>
+                    <a:pt x="1217582" y="492683"/>
+                  </a:lnTo>
+                  <a:lnTo>
+                    <a:pt x="1289205" y="517211"/>
+                  </a:lnTo>
+                  <a:lnTo>
+                    <a:pt x="1360827" y="541300"/>
+                  </a:lnTo>
+                  <a:lnTo>
+                    <a:pt x="1432450" y="564956"/>
+                  </a:lnTo>
+                  <a:lnTo>
+                    <a:pt x="1504073" y="588188"/>
+                  </a:lnTo>
+                  <a:lnTo>
+                    <a:pt x="1575695" y="611004"/>
+                  </a:lnTo>
+                  <a:lnTo>
+                    <a:pt x="1647318" y="633410"/>
+                  </a:lnTo>
+                  <a:lnTo>
+                    <a:pt x="1718940" y="655414"/>
+                  </a:lnTo>
+                  <a:lnTo>
+                    <a:pt x="1790563" y="677024"/>
+                  </a:lnTo>
+                  <a:lnTo>
+                    <a:pt x="1862185" y="698246"/>
+                  </a:lnTo>
+                  <a:lnTo>
+                    <a:pt x="1933808" y="719087"/>
+                  </a:lnTo>
+                  <a:lnTo>
+                    <a:pt x="2005430" y="739555"/>
+                  </a:lnTo>
+                  <a:lnTo>
+                    <a:pt x="2077053" y="759655"/>
+                  </a:lnTo>
+                  <a:lnTo>
+                    <a:pt x="2148675" y="779395"/>
+                  </a:lnTo>
+                  <a:lnTo>
+                    <a:pt x="2220298" y="798781"/>
+                  </a:lnTo>
+                  <a:lnTo>
+                    <a:pt x="2291920" y="817819"/>
+                  </a:lnTo>
+                  <a:lnTo>
+                    <a:pt x="2363543" y="836516"/>
+                  </a:lnTo>
+                  <a:lnTo>
+                    <a:pt x="2435165" y="854877"/>
+                  </a:lnTo>
+                  <a:lnTo>
+                    <a:pt x="2506788" y="872909"/>
+                  </a:lnTo>
+                  <a:lnTo>
+                    <a:pt x="2578410" y="890618"/>
+                  </a:lnTo>
+                  <a:lnTo>
+                    <a:pt x="2650033" y="908009"/>
+                  </a:lnTo>
+                  <a:lnTo>
+                    <a:pt x="2721655" y="925088"/>
+                  </a:lnTo>
+                  <a:lnTo>
+                    <a:pt x="2793278" y="941861"/>
+                  </a:lnTo>
+                  <a:lnTo>
+                    <a:pt x="2864901" y="958332"/>
+                  </a:lnTo>
+                  <a:lnTo>
+                    <a:pt x="2936523" y="974509"/>
+                  </a:lnTo>
+                  <a:lnTo>
+                    <a:pt x="3008146" y="990395"/>
+                  </a:lnTo>
+                  <a:lnTo>
+                    <a:pt x="3079768" y="1005996"/>
+                  </a:lnTo>
+                  <a:lnTo>
+                    <a:pt x="3151391" y="1021318"/>
+                  </a:lnTo>
+                  <a:lnTo>
+                    <a:pt x="3223013" y="1030903"/>
+                  </a:lnTo>
+                  <a:lnTo>
+                    <a:pt x="3294636" y="1031312"/>
+                  </a:lnTo>
+                  <a:lnTo>
+                    <a:pt x="3366258" y="1031721"/>
+                  </a:lnTo>
+                  <a:lnTo>
+                    <a:pt x="3437881" y="1032129"/>
+                  </a:lnTo>
+                  <a:lnTo>
+                    <a:pt x="3509503" y="1032538"/>
+                  </a:lnTo>
+                  <a:lnTo>
+                    <a:pt x="3581126" y="1032946"/>
+                  </a:lnTo>
+                  <a:lnTo>
+                    <a:pt x="3652748" y="1033353"/>
+                  </a:lnTo>
+                  <a:lnTo>
+                    <a:pt x="3724371" y="1033761"/>
+                  </a:lnTo>
+                  <a:lnTo>
+                    <a:pt x="3795993" y="1034168"/>
+                  </a:lnTo>
+                  <a:lnTo>
+                    <a:pt x="3867616" y="1034576"/>
+                  </a:lnTo>
+                  <a:lnTo>
+                    <a:pt x="3939238" y="1034983"/>
+                  </a:lnTo>
+                  <a:lnTo>
+                    <a:pt x="4010861" y="1035390"/>
+                  </a:lnTo>
+                  <a:lnTo>
+                    <a:pt x="4082483" y="1035796"/>
+                  </a:lnTo>
+                  <a:lnTo>
+                    <a:pt x="4154106" y="1036203"/>
+                  </a:lnTo>
+                  <a:lnTo>
+                    <a:pt x="4225729" y="1036609"/>
+                  </a:lnTo>
+                  <a:lnTo>
+                    <a:pt x="4297351" y="1037015"/>
+                  </a:lnTo>
+                  <a:lnTo>
+                    <a:pt x="4368974" y="1037421"/>
+                  </a:lnTo>
+                  <a:lnTo>
+                    <a:pt x="4440596" y="1037826"/>
+                  </a:lnTo>
+                  <a:lnTo>
+                    <a:pt x="4512219" y="1038232"/>
+                  </a:lnTo>
+                  <a:lnTo>
+                    <a:pt x="4583841" y="1038637"/>
+                  </a:lnTo>
+                  <a:lnTo>
+                    <a:pt x="4655464" y="1039042"/>
+                  </a:lnTo>
+                  <a:lnTo>
+                    <a:pt x="4727086" y="1039447"/>
+                  </a:lnTo>
+                  <a:lnTo>
+                    <a:pt x="4798709" y="1039851"/>
+                  </a:lnTo>
+                  <a:lnTo>
+                    <a:pt x="4870331" y="1040256"/>
+                  </a:lnTo>
+                  <a:lnTo>
+                    <a:pt x="4941954" y="1040660"/>
+                  </a:lnTo>
+                  <a:lnTo>
+                    <a:pt x="5013576" y="1041064"/>
+                  </a:lnTo>
+                  <a:lnTo>
+                    <a:pt x="5085199" y="1041468"/>
+                  </a:lnTo>
+                  <a:lnTo>
+                    <a:pt x="5156821" y="1041872"/>
+                  </a:lnTo>
+                  <a:lnTo>
+                    <a:pt x="5228444" y="1042275"/>
+                  </a:lnTo>
+                  <a:lnTo>
+                    <a:pt x="5300066" y="1042678"/>
+                  </a:lnTo>
+                  <a:lnTo>
+                    <a:pt x="5371689" y="1043081"/>
+                  </a:lnTo>
+                  <a:lnTo>
+                    <a:pt x="5443311" y="1043484"/>
+                  </a:lnTo>
+                  <a:lnTo>
+                    <a:pt x="5514934" y="1043887"/>
+                  </a:lnTo>
+                  <a:lnTo>
+                    <a:pt x="5586557" y="1044289"/>
+                  </a:lnTo>
+                  <a:lnTo>
+                    <a:pt x="5658179" y="1044691"/>
+                  </a:lnTo>
+                  <a:lnTo>
+                    <a:pt x="5729802" y="1045093"/>
+                  </a:lnTo>
+                  <a:lnTo>
+                    <a:pt x="5801424" y="1045495"/>
+                  </a:lnTo>
+                  <a:lnTo>
+                    <a:pt x="5873047" y="1045897"/>
+                  </a:lnTo>
+                  <a:lnTo>
+                    <a:pt x="5944669" y="1046298"/>
+                  </a:lnTo>
+                  <a:lnTo>
+                    <a:pt x="6016292" y="1046700"/>
+                  </a:lnTo>
+                  <a:lnTo>
+                    <a:pt x="6087914" y="1047101"/>
+                  </a:lnTo>
+                  <a:lnTo>
+                    <a:pt x="6159537" y="1047502"/>
+                  </a:lnTo>
+                  <a:lnTo>
+                    <a:pt x="6231159" y="1047902"/>
+                  </a:lnTo>
+                  <a:lnTo>
+                    <a:pt x="6302782" y="1048303"/>
+                  </a:lnTo>
+                  <a:lnTo>
+                    <a:pt x="6374404" y="1048703"/>
+                  </a:lnTo>
+                  <a:lnTo>
+                    <a:pt x="6446027" y="1049103"/>
+                  </a:lnTo>
+                  <a:lnTo>
+                    <a:pt x="6517649" y="1049503"/>
+                  </a:lnTo>
+                  <a:lnTo>
+                    <a:pt x="6589272" y="1049903"/>
+                  </a:lnTo>
+                  <a:lnTo>
+                    <a:pt x="6660894" y="1050302"/>
+                  </a:lnTo>
+                  <a:lnTo>
+                    <a:pt x="6732517" y="1050701"/>
+                  </a:lnTo>
+                  <a:lnTo>
+                    <a:pt x="6804139" y="1051100"/>
+                  </a:lnTo>
+                  <a:lnTo>
+                    <a:pt x="6875762" y="1051499"/>
+                  </a:lnTo>
+                  <a:lnTo>
+                    <a:pt x="6947385" y="1051898"/>
+                  </a:lnTo>
+                  <a:lnTo>
+                    <a:pt x="7019007" y="1052296"/>
+                  </a:lnTo>
+                  <a:lnTo>
+                    <a:pt x="7090630" y="1052695"/>
+                  </a:lnTo>
+                  <a:lnTo>
+                    <a:pt x="7090630" y="1550194"/>
+                  </a:lnTo>
+                  <a:lnTo>
+                    <a:pt x="7019007" y="1544532"/>
+                  </a:lnTo>
+                  <a:lnTo>
+                    <a:pt x="6947385" y="1538766"/>
+                  </a:lnTo>
+                  <a:lnTo>
+                    <a:pt x="6875762" y="1532895"/>
+                  </a:lnTo>
+                  <a:lnTo>
+                    <a:pt x="6804139" y="1526917"/>
+                  </a:lnTo>
+                  <a:lnTo>
+                    <a:pt x="6732517" y="1520830"/>
+                  </a:lnTo>
+                  <a:lnTo>
+                    <a:pt x="6660894" y="1514631"/>
+                  </a:lnTo>
+                  <a:lnTo>
+                    <a:pt x="6589272" y="1508320"/>
+                  </a:lnTo>
+                  <a:lnTo>
+                    <a:pt x="6517649" y="1501893"/>
+                  </a:lnTo>
+                  <a:lnTo>
+                    <a:pt x="6446027" y="1495348"/>
+                  </a:lnTo>
+                  <a:lnTo>
+                    <a:pt x="6374404" y="1488685"/>
+                  </a:lnTo>
+                  <a:lnTo>
+                    <a:pt x="6302782" y="1481899"/>
+                  </a:lnTo>
+                  <a:lnTo>
+                    <a:pt x="6231159" y="1474990"/>
+                  </a:lnTo>
+                  <a:lnTo>
+                    <a:pt x="6159537" y="1467954"/>
+                  </a:lnTo>
+                  <a:lnTo>
+                    <a:pt x="6087914" y="1460790"/>
+                  </a:lnTo>
+                  <a:lnTo>
+                    <a:pt x="6016292" y="1453495"/>
+                  </a:lnTo>
+                  <a:lnTo>
+                    <a:pt x="5944669" y="1446066"/>
+                  </a:lnTo>
+                  <a:lnTo>
+                    <a:pt x="5873047" y="1438502"/>
+                  </a:lnTo>
+                  <a:lnTo>
+                    <a:pt x="5801424" y="1430800"/>
+                  </a:lnTo>
+                  <a:lnTo>
+                    <a:pt x="5729802" y="1422958"/>
+                  </a:lnTo>
+                  <a:lnTo>
+                    <a:pt x="5658179" y="1414972"/>
+                  </a:lnTo>
+                  <a:lnTo>
+                    <a:pt x="5586557" y="1406840"/>
+                  </a:lnTo>
+                  <a:lnTo>
+                    <a:pt x="5514934" y="1398559"/>
+                  </a:lnTo>
+                  <a:lnTo>
+                    <a:pt x="5443311" y="1390128"/>
+                  </a:lnTo>
+                  <a:lnTo>
+                    <a:pt x="5371689" y="1381542"/>
+                  </a:lnTo>
+                  <a:lnTo>
+                    <a:pt x="5300066" y="1372800"/>
+                  </a:lnTo>
+                  <a:lnTo>
+                    <a:pt x="5228444" y="1363898"/>
+                  </a:lnTo>
+                  <a:lnTo>
+                    <a:pt x="5156821" y="1354833"/>
+                  </a:lnTo>
+                  <a:lnTo>
+                    <a:pt x="5085199" y="1345603"/>
+                  </a:lnTo>
+                  <a:lnTo>
+                    <a:pt x="5013576" y="1336204"/>
+                  </a:lnTo>
+                  <a:lnTo>
+                    <a:pt x="4941954" y="1326634"/>
+                  </a:lnTo>
+                  <a:lnTo>
+                    <a:pt x="4870331" y="1316888"/>
+                  </a:lnTo>
+                  <a:lnTo>
+                    <a:pt x="4798709" y="1306965"/>
+                  </a:lnTo>
+                  <a:lnTo>
+                    <a:pt x="4727086" y="1296861"/>
+                  </a:lnTo>
+                  <a:lnTo>
+                    <a:pt x="4655464" y="1286572"/>
+                  </a:lnTo>
+                  <a:lnTo>
+                    <a:pt x="4583841" y="1276095"/>
+                  </a:lnTo>
+                  <a:lnTo>
+                    <a:pt x="4512219" y="1265426"/>
+                  </a:lnTo>
+                  <a:lnTo>
+                    <a:pt x="4440596" y="1254563"/>
+                  </a:lnTo>
+                  <a:lnTo>
+                    <a:pt x="4368974" y="1243502"/>
+                  </a:lnTo>
+                  <a:lnTo>
+                    <a:pt x="4297351" y="1232238"/>
+                  </a:lnTo>
+                  <a:lnTo>
+                    <a:pt x="4225729" y="1220769"/>
+                  </a:lnTo>
+                  <a:lnTo>
+                    <a:pt x="4154106" y="1209090"/>
+                  </a:lnTo>
+                  <a:lnTo>
+                    <a:pt x="4082483" y="1197198"/>
+                  </a:lnTo>
+                  <a:lnTo>
+                    <a:pt x="4010861" y="1185089"/>
+                  </a:lnTo>
+                  <a:lnTo>
+                    <a:pt x="3939238" y="1172759"/>
+                  </a:lnTo>
+                  <a:lnTo>
+                    <a:pt x="3867616" y="1160203"/>
+                  </a:lnTo>
+                  <a:lnTo>
+                    <a:pt x="3795993" y="1147418"/>
+                  </a:lnTo>
+                  <a:lnTo>
+                    <a:pt x="3724371" y="1134400"/>
+                  </a:lnTo>
+                  <a:lnTo>
+                    <a:pt x="3652748" y="1121144"/>
+                  </a:lnTo>
+                  <a:lnTo>
+                    <a:pt x="3581126" y="1107645"/>
+                  </a:lnTo>
+                  <a:lnTo>
+                    <a:pt x="3509503" y="1093900"/>
+                  </a:lnTo>
+                  <a:lnTo>
+                    <a:pt x="3437881" y="1079905"/>
+                  </a:lnTo>
+                  <a:lnTo>
+                    <a:pt x="3366258" y="1065653"/>
+                  </a:lnTo>
+                  <a:lnTo>
+                    <a:pt x="3294636" y="1051141"/>
+                  </a:lnTo>
+                  <a:lnTo>
+                    <a:pt x="3223013" y="1036365"/>
+                  </a:lnTo>
+                  <a:lnTo>
+                    <a:pt x="3151391" y="1030494"/>
+                  </a:lnTo>
+                  <a:lnTo>
+                    <a:pt x="3079768" y="1030085"/>
+                  </a:lnTo>
+                  <a:lnTo>
+                    <a:pt x="3008146" y="1029676"/>
+                  </a:lnTo>
+                  <a:lnTo>
+                    <a:pt x="2936523" y="1029266"/>
+                  </a:lnTo>
+                  <a:lnTo>
+                    <a:pt x="2864901" y="1028856"/>
+                  </a:lnTo>
+                  <a:lnTo>
+                    <a:pt x="2793278" y="1028446"/>
+                  </a:lnTo>
+                  <a:lnTo>
+                    <a:pt x="2721655" y="1028036"/>
+                  </a:lnTo>
+                  <a:lnTo>
+                    <a:pt x="2650033" y="1027625"/>
+                  </a:lnTo>
+                  <a:lnTo>
+                    <a:pt x="2578410" y="1027215"/>
+                  </a:lnTo>
+                  <a:lnTo>
+                    <a:pt x="2506788" y="1026804"/>
+                  </a:lnTo>
+                  <a:lnTo>
+                    <a:pt x="2435165" y="1026393"/>
+                  </a:lnTo>
+                  <a:lnTo>
+                    <a:pt x="2363543" y="1025982"/>
+                  </a:lnTo>
+                  <a:lnTo>
+                    <a:pt x="2291920" y="1025570"/>
+                  </a:lnTo>
+                  <a:lnTo>
+                    <a:pt x="2220298" y="1025158"/>
+                  </a:lnTo>
+                  <a:lnTo>
+                    <a:pt x="2148675" y="1024747"/>
+                  </a:lnTo>
+                  <a:lnTo>
+                    <a:pt x="2077053" y="1024335"/>
+                  </a:lnTo>
+                  <a:lnTo>
+                    <a:pt x="2005430" y="1023922"/>
+                  </a:lnTo>
+                  <a:lnTo>
+                    <a:pt x="1933808" y="1023510"/>
+                  </a:lnTo>
+                  <a:lnTo>
+                    <a:pt x="1862185" y="1023097"/>
+                  </a:lnTo>
+                  <a:lnTo>
+                    <a:pt x="1790563" y="1022684"/>
+                  </a:lnTo>
+                  <a:lnTo>
+                    <a:pt x="1718940" y="1022271"/>
+                  </a:lnTo>
+                  <a:lnTo>
+                    <a:pt x="1647318" y="1021858"/>
+                  </a:lnTo>
+                  <a:lnTo>
+                    <a:pt x="1575695" y="1021444"/>
+                  </a:lnTo>
+                  <a:lnTo>
+                    <a:pt x="1504073" y="1021031"/>
+                  </a:lnTo>
+                  <a:lnTo>
+                    <a:pt x="1432450" y="1020617"/>
+                  </a:lnTo>
+                  <a:lnTo>
+                    <a:pt x="1360827" y="1020203"/>
+                  </a:lnTo>
+                  <a:lnTo>
+                    <a:pt x="1289205" y="1019788"/>
+                  </a:lnTo>
+                  <a:lnTo>
+                    <a:pt x="1217582" y="1019374"/>
+                  </a:lnTo>
+                  <a:lnTo>
+                    <a:pt x="1145960" y="1018959"/>
+                  </a:lnTo>
+                  <a:lnTo>
+                    <a:pt x="1074337" y="1018544"/>
+                  </a:lnTo>
+                  <a:lnTo>
+                    <a:pt x="1002715" y="1018129"/>
+                  </a:lnTo>
+                  <a:lnTo>
+                    <a:pt x="931092" y="1017714"/>
+                  </a:lnTo>
+                  <a:lnTo>
+                    <a:pt x="859470" y="1017298"/>
+                  </a:lnTo>
+                  <a:lnTo>
+                    <a:pt x="787847" y="1016882"/>
+                  </a:lnTo>
+                  <a:lnTo>
+                    <a:pt x="716225" y="1016466"/>
+                  </a:lnTo>
+                  <a:lnTo>
+                    <a:pt x="644602" y="1016050"/>
+                  </a:lnTo>
+                  <a:lnTo>
+                    <a:pt x="572980" y="1015634"/>
+                  </a:lnTo>
+                  <a:lnTo>
+                    <a:pt x="501357" y="1015217"/>
+                  </a:lnTo>
+                  <a:lnTo>
+                    <a:pt x="429735" y="1014801"/>
+                  </a:lnTo>
+                  <a:lnTo>
+                    <a:pt x="358112" y="1014384"/>
+                  </a:lnTo>
+                  <a:lnTo>
+                    <a:pt x="286490" y="1013966"/>
+                  </a:lnTo>
+                  <a:lnTo>
+                    <a:pt x="214867" y="1013549"/>
+                  </a:lnTo>
+                  <a:lnTo>
+                    <a:pt x="143245" y="1013131"/>
+                  </a:lnTo>
+                  <a:lnTo>
+                    <a:pt x="71622" y="1012714"/>
+                  </a:lnTo>
+                  <a:lnTo>
+                    <a:pt x="0" y="1012296"/>
                   </a:lnTo>
                   <a:close/>
                 </a:path>
@@ -3633,312 +3633,312 @@
           </p:nvSpPr>
           <p:spPr>
             <a:xfrm>
-              <a:off x="1172049" y="3704579"/>
-              <a:ext cx="7090630" cy="1050045"/>
+              <a:off x="1172049" y="3697035"/>
+              <a:ext cx="7090630" cy="1052695"/>
             </a:xfrm>
             <a:custGeom>
               <a:avLst/>
               <a:pathLst>
-                <a:path w="7090630" h="1050045">
+                <a:path w="7090630" h="1052695">
                   <a:moveTo>
                     <a:pt x="0" y="0"/>
                   </a:moveTo>
                   <a:lnTo>
-                    <a:pt x="71622" y="33108"/>
-                  </a:lnTo>
-                  <a:lnTo>
-                    <a:pt x="143245" y="65625"/>
-                  </a:lnTo>
-                  <a:lnTo>
-                    <a:pt x="214867" y="97561"/>
-                  </a:lnTo>
-                  <a:lnTo>
-                    <a:pt x="286490" y="128926"/>
-                  </a:lnTo>
-                  <a:lnTo>
-                    <a:pt x="358112" y="159730"/>
-                  </a:lnTo>
-                  <a:lnTo>
-                    <a:pt x="429735" y="189984"/>
-                  </a:lnTo>
-                  <a:lnTo>
-                    <a:pt x="501357" y="219698"/>
-                  </a:lnTo>
-                  <a:lnTo>
-                    <a:pt x="572980" y="248880"/>
-                  </a:lnTo>
-                  <a:lnTo>
-                    <a:pt x="644602" y="277541"/>
-                  </a:lnTo>
-                  <a:lnTo>
-                    <a:pt x="716225" y="305690"/>
-                  </a:lnTo>
-                  <a:lnTo>
-                    <a:pt x="787847" y="333335"/>
-                  </a:lnTo>
-                  <a:lnTo>
-                    <a:pt x="859470" y="360487"/>
-                  </a:lnTo>
-                  <a:lnTo>
-                    <a:pt x="931092" y="387153"/>
-                  </a:lnTo>
-                  <a:lnTo>
-                    <a:pt x="1002715" y="413343"/>
-                  </a:lnTo>
-                  <a:lnTo>
-                    <a:pt x="1074337" y="439065"/>
-                  </a:lnTo>
-                  <a:lnTo>
-                    <a:pt x="1145960" y="464327"/>
-                  </a:lnTo>
-                  <a:lnTo>
-                    <a:pt x="1217582" y="489138"/>
-                  </a:lnTo>
-                  <a:lnTo>
-                    <a:pt x="1289205" y="513505"/>
-                  </a:lnTo>
-                  <a:lnTo>
-                    <a:pt x="1360827" y="537437"/>
-                  </a:lnTo>
-                  <a:lnTo>
-                    <a:pt x="1432450" y="560941"/>
-                  </a:lnTo>
-                  <a:lnTo>
-                    <a:pt x="1504073" y="584025"/>
-                  </a:lnTo>
-                  <a:lnTo>
-                    <a:pt x="1575695" y="606697"/>
-                  </a:lnTo>
-                  <a:lnTo>
-                    <a:pt x="1647318" y="628963"/>
-                  </a:lnTo>
-                  <a:lnTo>
-                    <a:pt x="1718940" y="650832"/>
-                  </a:lnTo>
-                  <a:lnTo>
-                    <a:pt x="1790563" y="672309"/>
-                  </a:lnTo>
-                  <a:lnTo>
-                    <a:pt x="1862185" y="693403"/>
-                  </a:lnTo>
-                  <a:lnTo>
-                    <a:pt x="1933808" y="714120"/>
-                  </a:lnTo>
-                  <a:lnTo>
-                    <a:pt x="2005430" y="734467"/>
-                  </a:lnTo>
-                  <a:lnTo>
-                    <a:pt x="2077053" y="754450"/>
-                  </a:lnTo>
-                  <a:lnTo>
-                    <a:pt x="2148675" y="774076"/>
-                  </a:lnTo>
-                  <a:lnTo>
-                    <a:pt x="2220298" y="793351"/>
-                  </a:lnTo>
-                  <a:lnTo>
-                    <a:pt x="2291920" y="812282"/>
-                  </a:lnTo>
-                  <a:lnTo>
-                    <a:pt x="2363543" y="830875"/>
-                  </a:lnTo>
-                  <a:lnTo>
-                    <a:pt x="2435165" y="849135"/>
-                  </a:lnTo>
-                  <a:lnTo>
-                    <a:pt x="2506788" y="867069"/>
-                  </a:lnTo>
-                  <a:lnTo>
-                    <a:pt x="2578410" y="884682"/>
-                  </a:lnTo>
-                  <a:lnTo>
-                    <a:pt x="2650033" y="901981"/>
-                  </a:lnTo>
-                  <a:lnTo>
-                    <a:pt x="2721655" y="918970"/>
-                  </a:lnTo>
-                  <a:lnTo>
-                    <a:pt x="2793278" y="935656"/>
-                  </a:lnTo>
-                  <a:lnTo>
-                    <a:pt x="2864901" y="952044"/>
-                  </a:lnTo>
-                  <a:lnTo>
-                    <a:pt x="2936523" y="968139"/>
-                  </a:lnTo>
-                  <a:lnTo>
-                    <a:pt x="3008146" y="983946"/>
-                  </a:lnTo>
-                  <a:lnTo>
-                    <a:pt x="3079768" y="999471"/>
-                  </a:lnTo>
-                  <a:lnTo>
-                    <a:pt x="3151391" y="1014718"/>
-                  </a:lnTo>
-                  <a:lnTo>
-                    <a:pt x="3223013" y="1023425"/>
-                  </a:lnTo>
-                  <a:lnTo>
-                    <a:pt x="3294636" y="1023926"/>
-                  </a:lnTo>
-                  <a:lnTo>
-                    <a:pt x="3366258" y="1024427"/>
-                  </a:lnTo>
-                  <a:lnTo>
-                    <a:pt x="3437881" y="1024927"/>
-                  </a:lnTo>
-                  <a:lnTo>
-                    <a:pt x="3509503" y="1025427"/>
-                  </a:lnTo>
-                  <a:lnTo>
-                    <a:pt x="3581126" y="1025927"/>
-                  </a:lnTo>
-                  <a:lnTo>
-                    <a:pt x="3652748" y="1026426"/>
-                  </a:lnTo>
-                  <a:lnTo>
-                    <a:pt x="3724371" y="1026925"/>
-                  </a:lnTo>
-                  <a:lnTo>
-                    <a:pt x="3795993" y="1027424"/>
-                  </a:lnTo>
-                  <a:lnTo>
-                    <a:pt x="3867616" y="1027922"/>
-                  </a:lnTo>
-                  <a:lnTo>
-                    <a:pt x="3939238" y="1028420"/>
-                  </a:lnTo>
-                  <a:lnTo>
-                    <a:pt x="4010861" y="1028918"/>
-                  </a:lnTo>
-                  <a:lnTo>
-                    <a:pt x="4082483" y="1029416"/>
-                  </a:lnTo>
-                  <a:lnTo>
-                    <a:pt x="4154106" y="1029913"/>
-                  </a:lnTo>
-                  <a:lnTo>
-                    <a:pt x="4225729" y="1030410"/>
-                  </a:lnTo>
-                  <a:lnTo>
-                    <a:pt x="4297351" y="1030907"/>
-                  </a:lnTo>
-                  <a:lnTo>
-                    <a:pt x="4368974" y="1031403"/>
-                  </a:lnTo>
-                  <a:lnTo>
-                    <a:pt x="4440596" y="1031899"/>
-                  </a:lnTo>
-                  <a:lnTo>
-                    <a:pt x="4512219" y="1032395"/>
-                  </a:lnTo>
-                  <a:lnTo>
-                    <a:pt x="4583841" y="1032891"/>
-                  </a:lnTo>
-                  <a:lnTo>
-                    <a:pt x="4655464" y="1033386"/>
-                  </a:lnTo>
-                  <a:lnTo>
-                    <a:pt x="4727086" y="1033881"/>
-                  </a:lnTo>
-                  <a:lnTo>
-                    <a:pt x="4798709" y="1034375"/>
-                  </a:lnTo>
-                  <a:lnTo>
-                    <a:pt x="4870331" y="1034870"/>
-                  </a:lnTo>
-                  <a:lnTo>
-                    <a:pt x="4941954" y="1035364"/>
-                  </a:lnTo>
-                  <a:lnTo>
-                    <a:pt x="5013576" y="1035857"/>
-                  </a:lnTo>
-                  <a:lnTo>
-                    <a:pt x="5085199" y="1036351"/>
-                  </a:lnTo>
-                  <a:lnTo>
-                    <a:pt x="5156821" y="1036844"/>
-                  </a:lnTo>
-                  <a:lnTo>
-                    <a:pt x="5228444" y="1037337"/>
-                  </a:lnTo>
-                  <a:lnTo>
-                    <a:pt x="5300066" y="1037829"/>
-                  </a:lnTo>
-                  <a:lnTo>
-                    <a:pt x="5371689" y="1038321"/>
-                  </a:lnTo>
-                  <a:lnTo>
-                    <a:pt x="5443311" y="1038813"/>
-                  </a:lnTo>
-                  <a:lnTo>
-                    <a:pt x="5514934" y="1039305"/>
-                  </a:lnTo>
-                  <a:lnTo>
-                    <a:pt x="5586557" y="1039796"/>
-                  </a:lnTo>
-                  <a:lnTo>
-                    <a:pt x="5658179" y="1040287"/>
-                  </a:lnTo>
-                  <a:lnTo>
-                    <a:pt x="5729802" y="1040778"/>
-                  </a:lnTo>
-                  <a:lnTo>
-                    <a:pt x="5801424" y="1041268"/>
-                  </a:lnTo>
-                  <a:lnTo>
-                    <a:pt x="5873047" y="1041758"/>
-                  </a:lnTo>
-                  <a:lnTo>
-                    <a:pt x="5944669" y="1042248"/>
-                  </a:lnTo>
-                  <a:lnTo>
-                    <a:pt x="6016292" y="1042738"/>
-                  </a:lnTo>
-                  <a:lnTo>
-                    <a:pt x="6087914" y="1043227"/>
-                  </a:lnTo>
-                  <a:lnTo>
-                    <a:pt x="6159537" y="1043716"/>
-                  </a:lnTo>
-                  <a:lnTo>
-                    <a:pt x="6231159" y="1044205"/>
-                  </a:lnTo>
-                  <a:lnTo>
-                    <a:pt x="6302782" y="1044693"/>
-                  </a:lnTo>
-                  <a:lnTo>
-                    <a:pt x="6374404" y="1045181"/>
-                  </a:lnTo>
-                  <a:lnTo>
-                    <a:pt x="6446027" y="1045669"/>
-                  </a:lnTo>
-                  <a:lnTo>
-                    <a:pt x="6517649" y="1046156"/>
-                  </a:lnTo>
-                  <a:lnTo>
-                    <a:pt x="6589272" y="1046643"/>
-                  </a:lnTo>
-                  <a:lnTo>
-                    <a:pt x="6660894" y="1047130"/>
-                  </a:lnTo>
-                  <a:lnTo>
-                    <a:pt x="6732517" y="1047617"/>
-                  </a:lnTo>
-                  <a:lnTo>
-                    <a:pt x="6804139" y="1048103"/>
-                  </a:lnTo>
-                  <a:lnTo>
-                    <a:pt x="6875762" y="1048589"/>
-                  </a:lnTo>
-                  <a:lnTo>
-                    <a:pt x="6947385" y="1049075"/>
-                  </a:lnTo>
-                  <a:lnTo>
-                    <a:pt x="7019007" y="1049560"/>
-                  </a:lnTo>
-                  <a:lnTo>
-                    <a:pt x="7090630" y="1050045"/>
+                    <a:pt x="71622" y="33365"/>
+                  </a:lnTo>
+                  <a:lnTo>
+                    <a:pt x="143245" y="66132"/>
+                  </a:lnTo>
+                  <a:lnTo>
+                    <a:pt x="214867" y="98311"/>
+                  </a:lnTo>
+                  <a:lnTo>
+                    <a:pt x="286490" y="129913"/>
+                  </a:lnTo>
+                  <a:lnTo>
+                    <a:pt x="358112" y="160948"/>
+                  </a:lnTo>
+                  <a:lnTo>
+                    <a:pt x="429735" y="191427"/>
+                  </a:lnTo>
+                  <a:lnTo>
+                    <a:pt x="501357" y="221359"/>
+                  </a:lnTo>
+                  <a:lnTo>
+                    <a:pt x="572980" y="250754"/>
+                  </a:lnTo>
+                  <a:lnTo>
+                    <a:pt x="644602" y="279621"/>
+                  </a:lnTo>
+                  <a:lnTo>
+                    <a:pt x="716225" y="307971"/>
+                  </a:lnTo>
+                  <a:lnTo>
+                    <a:pt x="787847" y="335813"/>
+                  </a:lnTo>
+                  <a:lnTo>
+                    <a:pt x="859470" y="363155"/>
+                  </a:lnTo>
+                  <a:lnTo>
+                    <a:pt x="931092" y="390007"/>
+                  </a:lnTo>
+                  <a:lnTo>
+                    <a:pt x="1002715" y="416377"/>
+                  </a:lnTo>
+                  <a:lnTo>
+                    <a:pt x="1074337" y="442274"/>
+                  </a:lnTo>
+                  <a:lnTo>
+                    <a:pt x="1145960" y="467706"/>
+                  </a:lnTo>
+                  <a:lnTo>
+                    <a:pt x="1217582" y="492683"/>
+                  </a:lnTo>
+                  <a:lnTo>
+                    <a:pt x="1289205" y="517211"/>
+                  </a:lnTo>
+                  <a:lnTo>
+                    <a:pt x="1360827" y="541300"/>
+                  </a:lnTo>
+                  <a:lnTo>
+                    <a:pt x="1432450" y="564956"/>
+                  </a:lnTo>
+                  <a:lnTo>
+                    <a:pt x="1504073" y="588188"/>
+                  </a:lnTo>
+                  <a:lnTo>
+                    <a:pt x="1575695" y="611004"/>
+                  </a:lnTo>
+                  <a:lnTo>
+                    <a:pt x="1647318" y="633410"/>
+                  </a:lnTo>
+                  <a:lnTo>
+                    <a:pt x="1718940" y="655414"/>
+                  </a:lnTo>
+                  <a:lnTo>
+                    <a:pt x="1790563" y="677024"/>
+                  </a:lnTo>
+                  <a:lnTo>
+                    <a:pt x="1862185" y="698246"/>
+                  </a:lnTo>
+                  <a:lnTo>
+                    <a:pt x="1933808" y="719087"/>
+                  </a:lnTo>
+                  <a:lnTo>
+                    <a:pt x="2005430" y="739555"/>
+                  </a:lnTo>
+                  <a:lnTo>
+                    <a:pt x="2077053" y="759655"/>
+                  </a:lnTo>
+                  <a:lnTo>
+                    <a:pt x="2148675" y="779395"/>
+                  </a:lnTo>
+                  <a:lnTo>
+                    <a:pt x="2220298" y="798781"/>
+                  </a:lnTo>
+                  <a:lnTo>
+                    <a:pt x="2291920" y="817819"/>
+                  </a:lnTo>
+                  <a:lnTo>
+                    <a:pt x="2363543" y="836516"/>
+                  </a:lnTo>
+                  <a:lnTo>
+                    <a:pt x="2435165" y="854877"/>
+                  </a:lnTo>
+                  <a:lnTo>
+                    <a:pt x="2506788" y="872909"/>
+                  </a:lnTo>
+                  <a:lnTo>
+                    <a:pt x="2578410" y="890618"/>
+                  </a:lnTo>
+                  <a:lnTo>
+                    <a:pt x="2650033" y="908009"/>
+                  </a:lnTo>
+                  <a:lnTo>
+                    <a:pt x="2721655" y="925088"/>
+                  </a:lnTo>
+                  <a:lnTo>
+                    <a:pt x="2793278" y="941861"/>
+                  </a:lnTo>
+                  <a:lnTo>
+                    <a:pt x="2864901" y="958332"/>
+                  </a:lnTo>
+                  <a:lnTo>
+                    <a:pt x="2936523" y="974509"/>
+                  </a:lnTo>
+                  <a:lnTo>
+                    <a:pt x="3008146" y="990395"/>
+                  </a:lnTo>
+                  <a:lnTo>
+                    <a:pt x="3079768" y="1005996"/>
+                  </a:lnTo>
+                  <a:lnTo>
+                    <a:pt x="3151391" y="1021318"/>
+                  </a:lnTo>
+                  <a:lnTo>
+                    <a:pt x="3223013" y="1030903"/>
+                  </a:lnTo>
+                  <a:lnTo>
+                    <a:pt x="3294636" y="1031312"/>
+                  </a:lnTo>
+                  <a:lnTo>
+                    <a:pt x="3366258" y="1031721"/>
+                  </a:lnTo>
+                  <a:lnTo>
+                    <a:pt x="3437881" y="1032129"/>
+                  </a:lnTo>
+                  <a:lnTo>
+                    <a:pt x="3509503" y="1032538"/>
+                  </a:lnTo>
+                  <a:lnTo>
+                    <a:pt x="3581126" y="1032946"/>
+                  </a:lnTo>
+                  <a:lnTo>
+                    <a:pt x="3652748" y="1033353"/>
+                  </a:lnTo>
+                  <a:lnTo>
+                    <a:pt x="3724371" y="1033761"/>
+                  </a:lnTo>
+                  <a:lnTo>
+                    <a:pt x="3795993" y="1034168"/>
+                  </a:lnTo>
+                  <a:lnTo>
+                    <a:pt x="3867616" y="1034576"/>
+                  </a:lnTo>
+                  <a:lnTo>
+                    <a:pt x="3939238" y="1034983"/>
+                  </a:lnTo>
+                  <a:lnTo>
+                    <a:pt x="4010861" y="1035390"/>
+                  </a:lnTo>
+                  <a:lnTo>
+                    <a:pt x="4082483" y="1035796"/>
+                  </a:lnTo>
+                  <a:lnTo>
+                    <a:pt x="4154106" y="1036203"/>
+                  </a:lnTo>
+                  <a:lnTo>
+                    <a:pt x="4225729" y="1036609"/>
+                  </a:lnTo>
+                  <a:lnTo>
+                    <a:pt x="4297351" y="1037015"/>
+                  </a:lnTo>
+                  <a:lnTo>
+                    <a:pt x="4368974" y="1037421"/>
+                  </a:lnTo>
+                  <a:lnTo>
+                    <a:pt x="4440596" y="1037826"/>
+                  </a:lnTo>
+                  <a:lnTo>
+                    <a:pt x="4512219" y="1038232"/>
+                  </a:lnTo>
+                  <a:lnTo>
+                    <a:pt x="4583841" y="1038637"/>
+                  </a:lnTo>
+                  <a:lnTo>
+                    <a:pt x="4655464" y="1039042"/>
+                  </a:lnTo>
+                  <a:lnTo>
+                    <a:pt x="4727086" y="1039447"/>
+                  </a:lnTo>
+                  <a:lnTo>
+                    <a:pt x="4798709" y="1039851"/>
+                  </a:lnTo>
+                  <a:lnTo>
+                    <a:pt x="4870331" y="1040256"/>
+                  </a:lnTo>
+                  <a:lnTo>
+                    <a:pt x="4941954" y="1040660"/>
+                  </a:lnTo>
+                  <a:lnTo>
+                    <a:pt x="5013576" y="1041064"/>
+                  </a:lnTo>
+                  <a:lnTo>
+                    <a:pt x="5085199" y="1041468"/>
+                  </a:lnTo>
+                  <a:lnTo>
+                    <a:pt x="5156821" y="1041872"/>
+                  </a:lnTo>
+                  <a:lnTo>
+                    <a:pt x="5228444" y="1042275"/>
+                  </a:lnTo>
+                  <a:lnTo>
+                    <a:pt x="5300066" y="1042678"/>
+                  </a:lnTo>
+                  <a:lnTo>
+                    <a:pt x="5371689" y="1043081"/>
+                  </a:lnTo>
+                  <a:lnTo>
+                    <a:pt x="5443311" y="1043484"/>
+                  </a:lnTo>
+                  <a:lnTo>
+                    <a:pt x="5514934" y="1043887"/>
+                  </a:lnTo>
+                  <a:lnTo>
+                    <a:pt x="5586557" y="1044289"/>
+                  </a:lnTo>
+                  <a:lnTo>
+                    <a:pt x="5658179" y="1044691"/>
+                  </a:lnTo>
+                  <a:lnTo>
+                    <a:pt x="5729802" y="1045093"/>
+                  </a:lnTo>
+                  <a:lnTo>
+                    <a:pt x="5801424" y="1045495"/>
+                  </a:lnTo>
+                  <a:lnTo>
+                    <a:pt x="5873047" y="1045897"/>
+                  </a:lnTo>
+                  <a:lnTo>
+                    <a:pt x="5944669" y="1046298"/>
+                  </a:lnTo>
+                  <a:lnTo>
+                    <a:pt x="6016292" y="1046700"/>
+                  </a:lnTo>
+                  <a:lnTo>
+                    <a:pt x="6087914" y="1047101"/>
+                  </a:lnTo>
+                  <a:lnTo>
+                    <a:pt x="6159537" y="1047502"/>
+                  </a:lnTo>
+                  <a:lnTo>
+                    <a:pt x="6231159" y="1047902"/>
+                  </a:lnTo>
+                  <a:lnTo>
+                    <a:pt x="6302782" y="1048303"/>
+                  </a:lnTo>
+                  <a:lnTo>
+                    <a:pt x="6374404" y="1048703"/>
+                  </a:lnTo>
+                  <a:lnTo>
+                    <a:pt x="6446027" y="1049103"/>
+                  </a:lnTo>
+                  <a:lnTo>
+                    <a:pt x="6517649" y="1049503"/>
+                  </a:lnTo>
+                  <a:lnTo>
+                    <a:pt x="6589272" y="1049903"/>
+                  </a:lnTo>
+                  <a:lnTo>
+                    <a:pt x="6660894" y="1050302"/>
+                  </a:lnTo>
+                  <a:lnTo>
+                    <a:pt x="6732517" y="1050701"/>
+                  </a:lnTo>
+                  <a:lnTo>
+                    <a:pt x="6804139" y="1051100"/>
+                  </a:lnTo>
+                  <a:lnTo>
+                    <a:pt x="6875762" y="1051499"/>
+                  </a:lnTo>
+                  <a:lnTo>
+                    <a:pt x="6947385" y="1051898"/>
+                  </a:lnTo>
+                  <a:lnTo>
+                    <a:pt x="7019007" y="1052296"/>
+                  </a:lnTo>
+                  <a:lnTo>
+                    <a:pt x="7090630" y="1052695"/>
                   </a:lnTo>
                 </a:path>
               </a:pathLst>
@@ -3958,309 +3958,309 @@
           </p:nvSpPr>
           <p:spPr>
             <a:xfrm>
-              <a:off x="1172049" y="4705147"/>
-              <a:ext cx="7090630" cy="541291"/>
+              <a:off x="1172049" y="4709331"/>
+              <a:ext cx="7090630" cy="537898"/>
             </a:xfrm>
             <a:custGeom>
               <a:avLst/>
               <a:pathLst>
-                <a:path w="7090630" h="541291">
+                <a:path w="7090630" h="537898">
                   <a:moveTo>
-                    <a:pt x="7090630" y="541291"/>
+                    <a:pt x="7090630" y="537898"/>
                   </a:moveTo>
                   <a:lnTo>
-                    <a:pt x="7019007" y="535636"/>
-                  </a:lnTo>
-                  <a:lnTo>
-                    <a:pt x="6947385" y="529877"/>
-                  </a:lnTo>
-                  <a:lnTo>
-                    <a:pt x="6875762" y="524014"/>
-                  </a:lnTo>
-                  <a:lnTo>
-                    <a:pt x="6804139" y="518044"/>
-                  </a:lnTo>
-                  <a:lnTo>
-                    <a:pt x="6732517" y="511966"/>
-                  </a:lnTo>
-                  <a:lnTo>
-                    <a:pt x="6660894" y="505777"/>
-                  </a:lnTo>
-                  <a:lnTo>
-                    <a:pt x="6589272" y="499475"/>
-                  </a:lnTo>
-                  <a:lnTo>
-                    <a:pt x="6517649" y="493059"/>
-                  </a:lnTo>
-                  <a:lnTo>
-                    <a:pt x="6446027" y="486526"/>
-                  </a:lnTo>
-                  <a:lnTo>
-                    <a:pt x="6374404" y="479874"/>
-                  </a:lnTo>
-                  <a:lnTo>
-                    <a:pt x="6302782" y="473101"/>
-                  </a:lnTo>
-                  <a:lnTo>
-                    <a:pt x="6231159" y="466204"/>
-                  </a:lnTo>
-                  <a:lnTo>
-                    <a:pt x="6159537" y="459183"/>
-                  </a:lnTo>
-                  <a:lnTo>
-                    <a:pt x="6087914" y="452033"/>
-                  </a:lnTo>
-                  <a:lnTo>
-                    <a:pt x="6016292" y="444753"/>
-                  </a:lnTo>
-                  <a:lnTo>
-                    <a:pt x="5944669" y="437341"/>
-                  </a:lnTo>
-                  <a:lnTo>
-                    <a:pt x="5873047" y="429794"/>
-                  </a:lnTo>
-                  <a:lnTo>
-                    <a:pt x="5801424" y="422110"/>
-                  </a:lnTo>
-                  <a:lnTo>
-                    <a:pt x="5729802" y="414286"/>
-                  </a:lnTo>
-                  <a:lnTo>
-                    <a:pt x="5658179" y="406320"/>
-                  </a:lnTo>
-                  <a:lnTo>
-                    <a:pt x="5586557" y="398208"/>
-                  </a:lnTo>
-                  <a:lnTo>
-                    <a:pt x="5514934" y="389949"/>
-                  </a:lnTo>
-                  <a:lnTo>
-                    <a:pt x="5443311" y="381540"/>
-                  </a:lnTo>
-                  <a:lnTo>
-                    <a:pt x="5371689" y="372978"/>
-                  </a:lnTo>
-                  <a:lnTo>
-                    <a:pt x="5300066" y="364260"/>
-                  </a:lnTo>
-                  <a:lnTo>
-                    <a:pt x="5228444" y="355383"/>
-                  </a:lnTo>
-                  <a:lnTo>
-                    <a:pt x="5156821" y="346345"/>
-                  </a:lnTo>
-                  <a:lnTo>
-                    <a:pt x="5085199" y="337142"/>
-                  </a:lnTo>
-                  <a:lnTo>
-                    <a:pt x="5013576" y="327772"/>
-                  </a:lnTo>
-                  <a:lnTo>
-                    <a:pt x="4941954" y="318231"/>
-                  </a:lnTo>
-                  <a:lnTo>
-                    <a:pt x="4870331" y="308517"/>
-                  </a:lnTo>
-                  <a:lnTo>
-                    <a:pt x="4798709" y="298626"/>
-                  </a:lnTo>
-                  <a:lnTo>
-                    <a:pt x="4727086" y="288555"/>
-                  </a:lnTo>
-                  <a:lnTo>
-                    <a:pt x="4655464" y="278301"/>
-                  </a:lnTo>
-                  <a:lnTo>
-                    <a:pt x="4583841" y="267860"/>
-                  </a:lnTo>
-                  <a:lnTo>
-                    <a:pt x="4512219" y="257229"/>
-                  </a:lnTo>
-                  <a:lnTo>
-                    <a:pt x="4440596" y="246405"/>
-                  </a:lnTo>
-                  <a:lnTo>
-                    <a:pt x="4368974" y="235384"/>
-                  </a:lnTo>
-                  <a:lnTo>
-                    <a:pt x="4297351" y="224162"/>
-                  </a:lnTo>
-                  <a:lnTo>
-                    <a:pt x="4225729" y="212736"/>
-                  </a:lnTo>
-                  <a:lnTo>
-                    <a:pt x="4154106" y="201102"/>
-                  </a:lnTo>
-                  <a:lnTo>
-                    <a:pt x="4082483" y="189257"/>
-                  </a:lnTo>
-                  <a:lnTo>
-                    <a:pt x="4010861" y="177196"/>
-                  </a:lnTo>
-                  <a:lnTo>
-                    <a:pt x="3939238" y="164915"/>
-                  </a:lnTo>
-                  <a:lnTo>
-                    <a:pt x="3867616" y="152411"/>
-                  </a:lnTo>
-                  <a:lnTo>
-                    <a:pt x="3795993" y="139680"/>
-                  </a:lnTo>
-                  <a:lnTo>
-                    <a:pt x="3724371" y="126717"/>
-                  </a:lnTo>
-                  <a:lnTo>
-                    <a:pt x="3652748" y="113518"/>
-                  </a:lnTo>
-                  <a:lnTo>
-                    <a:pt x="3581126" y="100078"/>
-                  </a:lnTo>
-                  <a:lnTo>
-                    <a:pt x="3509503" y="86395"/>
-                  </a:lnTo>
-                  <a:lnTo>
-                    <a:pt x="3437881" y="72462"/>
-                  </a:lnTo>
-                  <a:lnTo>
-                    <a:pt x="3366258" y="58276"/>
-                  </a:lnTo>
-                  <a:lnTo>
-                    <a:pt x="3294636" y="43831"/>
-                  </a:lnTo>
-                  <a:lnTo>
-                    <a:pt x="3223013" y="29124"/>
-                  </a:lnTo>
-                  <a:lnTo>
-                    <a:pt x="3151391" y="22355"/>
-                  </a:lnTo>
-                  <a:lnTo>
-                    <a:pt x="3079768" y="21854"/>
-                  </a:lnTo>
-                  <a:lnTo>
-                    <a:pt x="3008146" y="21352"/>
-                  </a:lnTo>
-                  <a:lnTo>
-                    <a:pt x="2936523" y="20850"/>
-                  </a:lnTo>
-                  <a:lnTo>
-                    <a:pt x="2864901" y="20347"/>
-                  </a:lnTo>
-                  <a:lnTo>
-                    <a:pt x="2793278" y="19845"/>
-                  </a:lnTo>
-                  <a:lnTo>
-                    <a:pt x="2721655" y="19342"/>
-                  </a:lnTo>
-                  <a:lnTo>
-                    <a:pt x="2650033" y="18838"/>
-                  </a:lnTo>
-                  <a:lnTo>
-                    <a:pt x="2578410" y="18335"/>
-                  </a:lnTo>
-                  <a:lnTo>
-                    <a:pt x="2506788" y="17831"/>
-                  </a:lnTo>
-                  <a:lnTo>
-                    <a:pt x="2435165" y="17326"/>
-                  </a:lnTo>
-                  <a:lnTo>
-                    <a:pt x="2363543" y="16822"/>
-                  </a:lnTo>
-                  <a:lnTo>
-                    <a:pt x="2291920" y="16317"/>
-                  </a:lnTo>
-                  <a:lnTo>
-                    <a:pt x="2220298" y="15812"/>
-                  </a:lnTo>
-                  <a:lnTo>
-                    <a:pt x="2148675" y="15306"/>
-                  </a:lnTo>
-                  <a:lnTo>
-                    <a:pt x="2077053" y="14801"/>
-                  </a:lnTo>
-                  <a:lnTo>
-                    <a:pt x="2005430" y="14294"/>
-                  </a:lnTo>
-                  <a:lnTo>
-                    <a:pt x="1933808" y="13788"/>
-                  </a:lnTo>
-                  <a:lnTo>
-                    <a:pt x="1862185" y="13281"/>
-                  </a:lnTo>
-                  <a:lnTo>
-                    <a:pt x="1790563" y="12774"/>
-                  </a:lnTo>
-                  <a:lnTo>
-                    <a:pt x="1718940" y="12267"/>
-                  </a:lnTo>
-                  <a:lnTo>
-                    <a:pt x="1647318" y="11760"/>
-                  </a:lnTo>
-                  <a:lnTo>
-                    <a:pt x="1575695" y="11252"/>
-                  </a:lnTo>
-                  <a:lnTo>
-                    <a:pt x="1504073" y="10743"/>
-                  </a:lnTo>
-                  <a:lnTo>
-                    <a:pt x="1432450" y="10235"/>
-                  </a:lnTo>
-                  <a:lnTo>
-                    <a:pt x="1360827" y="9726"/>
-                  </a:lnTo>
-                  <a:lnTo>
-                    <a:pt x="1289205" y="9217"/>
-                  </a:lnTo>
-                  <a:lnTo>
-                    <a:pt x="1217582" y="8707"/>
-                  </a:lnTo>
-                  <a:lnTo>
-                    <a:pt x="1145960" y="8198"/>
-                  </a:lnTo>
-                  <a:lnTo>
-                    <a:pt x="1074337" y="7688"/>
-                  </a:lnTo>
-                  <a:lnTo>
-                    <a:pt x="1002715" y="7177"/>
-                  </a:lnTo>
-                  <a:lnTo>
-                    <a:pt x="931092" y="6667"/>
-                  </a:lnTo>
-                  <a:lnTo>
-                    <a:pt x="859470" y="6156"/>
-                  </a:lnTo>
-                  <a:lnTo>
-                    <a:pt x="787847" y="5644"/>
-                  </a:lnTo>
-                  <a:lnTo>
-                    <a:pt x="716225" y="5133"/>
-                  </a:lnTo>
-                  <a:lnTo>
-                    <a:pt x="644602" y="4621"/>
-                  </a:lnTo>
-                  <a:lnTo>
-                    <a:pt x="572980" y="4108"/>
-                  </a:lnTo>
-                  <a:lnTo>
-                    <a:pt x="501357" y="3596"/>
-                  </a:lnTo>
-                  <a:lnTo>
-                    <a:pt x="429735" y="3083"/>
-                  </a:lnTo>
-                  <a:lnTo>
-                    <a:pt x="358112" y="2570"/>
-                  </a:lnTo>
-                  <a:lnTo>
-                    <a:pt x="286490" y="2056"/>
-                  </a:lnTo>
-                  <a:lnTo>
-                    <a:pt x="214867" y="1543"/>
-                  </a:lnTo>
-                  <a:lnTo>
-                    <a:pt x="143245" y="1029"/>
-                  </a:lnTo>
-                  <a:lnTo>
-                    <a:pt x="71622" y="514"/>
+                    <a:pt x="7019007" y="532236"/>
+                  </a:lnTo>
+                  <a:lnTo>
+                    <a:pt x="6947385" y="526470"/>
+                  </a:lnTo>
+                  <a:lnTo>
+                    <a:pt x="6875762" y="520599"/>
+                  </a:lnTo>
+                  <a:lnTo>
+                    <a:pt x="6804139" y="514621"/>
+                  </a:lnTo>
+                  <a:lnTo>
+                    <a:pt x="6732517" y="508534"/>
+                  </a:lnTo>
+                  <a:lnTo>
+                    <a:pt x="6660894" y="502335"/>
+                  </a:lnTo>
+                  <a:lnTo>
+                    <a:pt x="6589272" y="496024"/>
+                  </a:lnTo>
+                  <a:lnTo>
+                    <a:pt x="6517649" y="489597"/>
+                  </a:lnTo>
+                  <a:lnTo>
+                    <a:pt x="6446027" y="483052"/>
+                  </a:lnTo>
+                  <a:lnTo>
+                    <a:pt x="6374404" y="476389"/>
+                  </a:lnTo>
+                  <a:lnTo>
+                    <a:pt x="6302782" y="469603"/>
+                  </a:lnTo>
+                  <a:lnTo>
+                    <a:pt x="6231159" y="462693"/>
+                  </a:lnTo>
+                  <a:lnTo>
+                    <a:pt x="6159537" y="455658"/>
+                  </a:lnTo>
+                  <a:lnTo>
+                    <a:pt x="6087914" y="448494"/>
+                  </a:lnTo>
+                  <a:lnTo>
+                    <a:pt x="6016292" y="441199"/>
+                  </a:lnTo>
+                  <a:lnTo>
+                    <a:pt x="5944669" y="433770"/>
+                  </a:lnTo>
+                  <a:lnTo>
+                    <a:pt x="5873047" y="426206"/>
+                  </a:lnTo>
+                  <a:lnTo>
+                    <a:pt x="5801424" y="418504"/>
+                  </a:lnTo>
+                  <a:lnTo>
+                    <a:pt x="5729802" y="410662"/>
+                  </a:lnTo>
+                  <a:lnTo>
+                    <a:pt x="5658179" y="402676"/>
+                  </a:lnTo>
+                  <a:lnTo>
+                    <a:pt x="5586557" y="394544"/>
+                  </a:lnTo>
+                  <a:lnTo>
+                    <a:pt x="5514934" y="386263"/>
+                  </a:lnTo>
+                  <a:lnTo>
+                    <a:pt x="5443311" y="377832"/>
+                  </a:lnTo>
+                  <a:lnTo>
+                    <a:pt x="5371689" y="369246"/>
+                  </a:lnTo>
+                  <a:lnTo>
+                    <a:pt x="5300066" y="360504"/>
+                  </a:lnTo>
+                  <a:lnTo>
+                    <a:pt x="5228444" y="351602"/>
+                  </a:lnTo>
+                  <a:lnTo>
+                    <a:pt x="5156821" y="342537"/>
+                  </a:lnTo>
+                  <a:lnTo>
+                    <a:pt x="5085199" y="333307"/>
+                  </a:lnTo>
+                  <a:lnTo>
+                    <a:pt x="5013576" y="323908"/>
+                  </a:lnTo>
+                  <a:lnTo>
+                    <a:pt x="4941954" y="314338"/>
+                  </a:lnTo>
+                  <a:lnTo>
+                    <a:pt x="4870331" y="304592"/>
+                  </a:lnTo>
+                  <a:lnTo>
+                    <a:pt x="4798709" y="294669"/>
+                  </a:lnTo>
+                  <a:lnTo>
+                    <a:pt x="4727086" y="284565"/>
+                  </a:lnTo>
+                  <a:lnTo>
+                    <a:pt x="4655464" y="274276"/>
+                  </a:lnTo>
+                  <a:lnTo>
+                    <a:pt x="4583841" y="263799"/>
+                  </a:lnTo>
+                  <a:lnTo>
+                    <a:pt x="4512219" y="253130"/>
+                  </a:lnTo>
+                  <a:lnTo>
+                    <a:pt x="4440596" y="242267"/>
+                  </a:lnTo>
+                  <a:lnTo>
+                    <a:pt x="4368974" y="231206"/>
+                  </a:lnTo>
+                  <a:lnTo>
+                    <a:pt x="4297351" y="219942"/>
+                  </a:lnTo>
+                  <a:lnTo>
+                    <a:pt x="4225729" y="208473"/>
+                  </a:lnTo>
+                  <a:lnTo>
+                    <a:pt x="4154106" y="196794"/>
+                  </a:lnTo>
+                  <a:lnTo>
+                    <a:pt x="4082483" y="184902"/>
+                  </a:lnTo>
+                  <a:lnTo>
+                    <a:pt x="4010861" y="172793"/>
+                  </a:lnTo>
+                  <a:lnTo>
+                    <a:pt x="3939238" y="160463"/>
+                  </a:lnTo>
+                  <a:lnTo>
+                    <a:pt x="3867616" y="147907"/>
+                  </a:lnTo>
+                  <a:lnTo>
+                    <a:pt x="3795993" y="135122"/>
+                  </a:lnTo>
+                  <a:lnTo>
+                    <a:pt x="3724371" y="122104"/>
+                  </a:lnTo>
+                  <a:lnTo>
+                    <a:pt x="3652748" y="108847"/>
+                  </a:lnTo>
+                  <a:lnTo>
+                    <a:pt x="3581126" y="95349"/>
+                  </a:lnTo>
+                  <a:lnTo>
+                    <a:pt x="3509503" y="81604"/>
+                  </a:lnTo>
+                  <a:lnTo>
+                    <a:pt x="3437881" y="67609"/>
+                  </a:lnTo>
+                  <a:lnTo>
+                    <a:pt x="3366258" y="53357"/>
+                  </a:lnTo>
+                  <a:lnTo>
+                    <a:pt x="3294636" y="38845"/>
+                  </a:lnTo>
+                  <a:lnTo>
+                    <a:pt x="3223013" y="24069"/>
+                  </a:lnTo>
+                  <a:lnTo>
+                    <a:pt x="3151391" y="18198"/>
+                  </a:lnTo>
+                  <a:lnTo>
+                    <a:pt x="3079768" y="17789"/>
+                  </a:lnTo>
+                  <a:lnTo>
+                    <a:pt x="3008146" y="17380"/>
+                  </a:lnTo>
+                  <a:lnTo>
+                    <a:pt x="2936523" y="16970"/>
+                  </a:lnTo>
+                  <a:lnTo>
+                    <a:pt x="2864901" y="16560"/>
+                  </a:lnTo>
+                  <a:lnTo>
+                    <a:pt x="2793278" y="16150"/>
+                  </a:lnTo>
+                  <a:lnTo>
+                    <a:pt x="2721655" y="15740"/>
+                  </a:lnTo>
+                  <a:lnTo>
+                    <a:pt x="2650033" y="15329"/>
+                  </a:lnTo>
+                  <a:lnTo>
+                    <a:pt x="2578410" y="14919"/>
+                  </a:lnTo>
+                  <a:lnTo>
+                    <a:pt x="2506788" y="14508"/>
+                  </a:lnTo>
+                  <a:lnTo>
+                    <a:pt x="2435165" y="14097"/>
+                  </a:lnTo>
+                  <a:lnTo>
+                    <a:pt x="2363543" y="13686"/>
+                  </a:lnTo>
+                  <a:lnTo>
+                    <a:pt x="2291920" y="13274"/>
+                  </a:lnTo>
+                  <a:lnTo>
+                    <a:pt x="2220298" y="12862"/>
+                  </a:lnTo>
+                  <a:lnTo>
+                    <a:pt x="2148675" y="12451"/>
+                  </a:lnTo>
+                  <a:lnTo>
+                    <a:pt x="2077053" y="12039"/>
+                  </a:lnTo>
+                  <a:lnTo>
+                    <a:pt x="2005430" y="11626"/>
+                  </a:lnTo>
+                  <a:lnTo>
+                    <a:pt x="1933808" y="11214"/>
+                  </a:lnTo>
+                  <a:lnTo>
+                    <a:pt x="1862185" y="10801"/>
+                  </a:lnTo>
+                  <a:lnTo>
+                    <a:pt x="1790563" y="10388"/>
+                  </a:lnTo>
+                  <a:lnTo>
+                    <a:pt x="1718940" y="9975"/>
+                  </a:lnTo>
+                  <a:lnTo>
+                    <a:pt x="1647318" y="9562"/>
+                  </a:lnTo>
+                  <a:lnTo>
+                    <a:pt x="1575695" y="9148"/>
+                  </a:lnTo>
+                  <a:lnTo>
+                    <a:pt x="1504073" y="8735"/>
+                  </a:lnTo>
+                  <a:lnTo>
+                    <a:pt x="1432450" y="8321"/>
+                  </a:lnTo>
+                  <a:lnTo>
+                    <a:pt x="1360827" y="7907"/>
+                  </a:lnTo>
+                  <a:lnTo>
+                    <a:pt x="1289205" y="7492"/>
+                  </a:lnTo>
+                  <a:lnTo>
+                    <a:pt x="1217582" y="7078"/>
+                  </a:lnTo>
+                  <a:lnTo>
+                    <a:pt x="1145960" y="6663"/>
+                  </a:lnTo>
+                  <a:lnTo>
+                    <a:pt x="1074337" y="6248"/>
+                  </a:lnTo>
+                  <a:lnTo>
+                    <a:pt x="1002715" y="5833"/>
+                  </a:lnTo>
+                  <a:lnTo>
+                    <a:pt x="931092" y="5418"/>
+                  </a:lnTo>
+                  <a:lnTo>
+                    <a:pt x="859470" y="5002"/>
+                  </a:lnTo>
+                  <a:lnTo>
+                    <a:pt x="787847" y="4586"/>
+                  </a:lnTo>
+                  <a:lnTo>
+                    <a:pt x="716225" y="4170"/>
+                  </a:lnTo>
+                  <a:lnTo>
+                    <a:pt x="644602" y="3754"/>
+                  </a:lnTo>
+                  <a:lnTo>
+                    <a:pt x="572980" y="3338"/>
+                  </a:lnTo>
+                  <a:lnTo>
+                    <a:pt x="501357" y="2921"/>
+                  </a:lnTo>
+                  <a:lnTo>
+                    <a:pt x="429735" y="2504"/>
+                  </a:lnTo>
+                  <a:lnTo>
+                    <a:pt x="358112" y="2087"/>
+                  </a:lnTo>
+                  <a:lnTo>
+                    <a:pt x="286490" y="1670"/>
+                  </a:lnTo>
+                  <a:lnTo>
+                    <a:pt x="214867" y="1253"/>
+                  </a:lnTo>
+                  <a:lnTo>
+                    <a:pt x="143245" y="835"/>
+                  </a:lnTo>
+                  <a:lnTo>
+                    <a:pt x="71622" y="418"/>
                   </a:lnTo>
                   <a:lnTo>
                     <a:pt x="0" y="0"/>
@@ -4283,312 +4283,312 @@
           </p:nvSpPr>
           <p:spPr>
             <a:xfrm>
-              <a:off x="1172049" y="4300800"/>
-              <a:ext cx="7090630" cy="756985"/>
+              <a:off x="1172049" y="4301340"/>
+              <a:ext cx="7090630" cy="755562"/>
             </a:xfrm>
             <a:custGeom>
               <a:avLst/>
               <a:pathLst>
-                <a:path w="7090630" h="756985">
+                <a:path w="7090630" h="755562">
                   <a:moveTo>
                     <a:pt x="0" y="0"/>
                   </a:moveTo>
                   <a:lnTo>
-                    <a:pt x="71622" y="11653"/>
-                  </a:lnTo>
-                  <a:lnTo>
-                    <a:pt x="143245" y="23199"/>
-                  </a:lnTo>
-                  <a:lnTo>
-                    <a:pt x="214867" y="34637"/>
-                  </a:lnTo>
-                  <a:lnTo>
-                    <a:pt x="286490" y="45969"/>
-                  </a:lnTo>
-                  <a:lnTo>
-                    <a:pt x="358112" y="57196"/>
-                  </a:lnTo>
-                  <a:lnTo>
-                    <a:pt x="429735" y="68319"/>
-                  </a:lnTo>
-                  <a:lnTo>
-                    <a:pt x="501357" y="79339"/>
-                  </a:lnTo>
-                  <a:lnTo>
-                    <a:pt x="572980" y="90257"/>
-                  </a:lnTo>
-                  <a:lnTo>
-                    <a:pt x="644602" y="101073"/>
-                  </a:lnTo>
-                  <a:lnTo>
-                    <a:pt x="716225" y="111790"/>
-                  </a:lnTo>
-                  <a:lnTo>
-                    <a:pt x="787847" y="122406"/>
-                  </a:lnTo>
-                  <a:lnTo>
-                    <a:pt x="859470" y="132925"/>
-                  </a:lnTo>
-                  <a:lnTo>
-                    <a:pt x="931092" y="143345"/>
-                  </a:lnTo>
-                  <a:lnTo>
-                    <a:pt x="1002715" y="153669"/>
-                  </a:lnTo>
-                  <a:lnTo>
-                    <a:pt x="1074337" y="163898"/>
-                  </a:lnTo>
-                  <a:lnTo>
-                    <a:pt x="1145960" y="174031"/>
-                  </a:lnTo>
-                  <a:lnTo>
-                    <a:pt x="1217582" y="184070"/>
-                  </a:lnTo>
-                  <a:lnTo>
-                    <a:pt x="1289205" y="194017"/>
-                  </a:lnTo>
-                  <a:lnTo>
-                    <a:pt x="1360827" y="203871"/>
-                  </a:lnTo>
-                  <a:lnTo>
-                    <a:pt x="1432450" y="213633"/>
-                  </a:lnTo>
-                  <a:lnTo>
-                    <a:pt x="1504073" y="223306"/>
-                  </a:lnTo>
-                  <a:lnTo>
-                    <a:pt x="1575695" y="232888"/>
-                  </a:lnTo>
-                  <a:lnTo>
-                    <a:pt x="1647318" y="242381"/>
-                  </a:lnTo>
-                  <a:lnTo>
-                    <a:pt x="1718940" y="251787"/>
-                  </a:lnTo>
-                  <a:lnTo>
-                    <a:pt x="1790563" y="261105"/>
-                  </a:lnTo>
-                  <a:lnTo>
-                    <a:pt x="1862185" y="270337"/>
-                  </a:lnTo>
-                  <a:lnTo>
-                    <a:pt x="1933808" y="279483"/>
-                  </a:lnTo>
-                  <a:lnTo>
-                    <a:pt x="2005430" y="288544"/>
-                  </a:lnTo>
-                  <a:lnTo>
-                    <a:pt x="2077053" y="297522"/>
-                  </a:lnTo>
-                  <a:lnTo>
-                    <a:pt x="2148675" y="306416"/>
-                  </a:lnTo>
-                  <a:lnTo>
-                    <a:pt x="2220298" y="315227"/>
-                  </a:lnTo>
-                  <a:lnTo>
-                    <a:pt x="2291920" y="323957"/>
-                  </a:lnTo>
-                  <a:lnTo>
-                    <a:pt x="2363543" y="332606"/>
-                  </a:lnTo>
-                  <a:lnTo>
-                    <a:pt x="2435165" y="341175"/>
-                  </a:lnTo>
-                  <a:lnTo>
-                    <a:pt x="2506788" y="349664"/>
-                  </a:lnTo>
-                  <a:lnTo>
-                    <a:pt x="2578410" y="358074"/>
-                  </a:lnTo>
-                  <a:lnTo>
-                    <a:pt x="2650033" y="366407"/>
-                  </a:lnTo>
-                  <a:lnTo>
-                    <a:pt x="2721655" y="374662"/>
-                  </a:lnTo>
-                  <a:lnTo>
-                    <a:pt x="2793278" y="382840"/>
-                  </a:lnTo>
-                  <a:lnTo>
-                    <a:pt x="2864901" y="390943"/>
-                  </a:lnTo>
-                  <a:lnTo>
-                    <a:pt x="2936523" y="398971"/>
-                  </a:lnTo>
-                  <a:lnTo>
-                    <a:pt x="3008146" y="406924"/>
-                  </a:lnTo>
-                  <a:lnTo>
-                    <a:pt x="3079768" y="414803"/>
-                  </a:lnTo>
-                  <a:lnTo>
-                    <a:pt x="3151391" y="422609"/>
-                  </a:lnTo>
-                  <a:lnTo>
-                    <a:pt x="3223013" y="430343"/>
-                  </a:lnTo>
-                  <a:lnTo>
-                    <a:pt x="3294636" y="438005"/>
-                  </a:lnTo>
-                  <a:lnTo>
-                    <a:pt x="3366258" y="445596"/>
-                  </a:lnTo>
-                  <a:lnTo>
-                    <a:pt x="3437881" y="453117"/>
-                  </a:lnTo>
-                  <a:lnTo>
-                    <a:pt x="3509503" y="460568"/>
-                  </a:lnTo>
-                  <a:lnTo>
-                    <a:pt x="3581126" y="467950"/>
-                  </a:lnTo>
-                  <a:lnTo>
-                    <a:pt x="3652748" y="475263"/>
-                  </a:lnTo>
-                  <a:lnTo>
-                    <a:pt x="3724371" y="482509"/>
-                  </a:lnTo>
-                  <a:lnTo>
-                    <a:pt x="3795993" y="489687"/>
-                  </a:lnTo>
-                  <a:lnTo>
-                    <a:pt x="3867616" y="496799"/>
-                  </a:lnTo>
-                  <a:lnTo>
-                    <a:pt x="3939238" y="503844"/>
-                  </a:lnTo>
-                  <a:lnTo>
-                    <a:pt x="4010861" y="510825"/>
-                  </a:lnTo>
-                  <a:lnTo>
-                    <a:pt x="4082483" y="517740"/>
-                  </a:lnTo>
-                  <a:lnTo>
-                    <a:pt x="4154106" y="524592"/>
-                  </a:lnTo>
-                  <a:lnTo>
-                    <a:pt x="4225729" y="531380"/>
-                  </a:lnTo>
-                  <a:lnTo>
-                    <a:pt x="4297351" y="538105"/>
-                  </a:lnTo>
-                  <a:lnTo>
-                    <a:pt x="4368974" y="544768"/>
-                  </a:lnTo>
-                  <a:lnTo>
-                    <a:pt x="4440596" y="551368"/>
-                  </a:lnTo>
-                  <a:lnTo>
-                    <a:pt x="4512219" y="557908"/>
-                  </a:lnTo>
-                  <a:lnTo>
-                    <a:pt x="4583841" y="564387"/>
-                  </a:lnTo>
-                  <a:lnTo>
-                    <a:pt x="4655464" y="570806"/>
-                  </a:lnTo>
-                  <a:lnTo>
-                    <a:pt x="4727086" y="577165"/>
-                  </a:lnTo>
-                  <a:lnTo>
-                    <a:pt x="4798709" y="583466"/>
-                  </a:lnTo>
-                  <a:lnTo>
-                    <a:pt x="4870331" y="589708"/>
-                  </a:lnTo>
-                  <a:lnTo>
-                    <a:pt x="4941954" y="595892"/>
-                  </a:lnTo>
-                  <a:lnTo>
-                    <a:pt x="5013576" y="602018"/>
-                  </a:lnTo>
-                  <a:lnTo>
-                    <a:pt x="5085199" y="608088"/>
-                  </a:lnTo>
-                  <a:lnTo>
-                    <a:pt x="5156821" y="614102"/>
-                  </a:lnTo>
-                  <a:lnTo>
-                    <a:pt x="5228444" y="620059"/>
-                  </a:lnTo>
-                  <a:lnTo>
-                    <a:pt x="5300066" y="625962"/>
-                  </a:lnTo>
-                  <a:lnTo>
-                    <a:pt x="5371689" y="631810"/>
-                  </a:lnTo>
-                  <a:lnTo>
-                    <a:pt x="5443311" y="637603"/>
-                  </a:lnTo>
-                  <a:lnTo>
-                    <a:pt x="5514934" y="643343"/>
-                  </a:lnTo>
-                  <a:lnTo>
-                    <a:pt x="5586557" y="649029"/>
-                  </a:lnTo>
-                  <a:lnTo>
-                    <a:pt x="5658179" y="654663"/>
-                  </a:lnTo>
-                  <a:lnTo>
-                    <a:pt x="5729802" y="660245"/>
-                  </a:lnTo>
-                  <a:lnTo>
-                    <a:pt x="5801424" y="665775"/>
-                  </a:lnTo>
-                  <a:lnTo>
-                    <a:pt x="5873047" y="671253"/>
-                  </a:lnTo>
-                  <a:lnTo>
-                    <a:pt x="5944669" y="676681"/>
-                  </a:lnTo>
-                  <a:lnTo>
-                    <a:pt x="6016292" y="682058"/>
-                  </a:lnTo>
-                  <a:lnTo>
-                    <a:pt x="6087914" y="687386"/>
-                  </a:lnTo>
-                  <a:lnTo>
-                    <a:pt x="6159537" y="692664"/>
-                  </a:lnTo>
-                  <a:lnTo>
-                    <a:pt x="6231159" y="697893"/>
-                  </a:lnTo>
-                  <a:lnTo>
-                    <a:pt x="6302782" y="703073"/>
-                  </a:lnTo>
-                  <a:lnTo>
-                    <a:pt x="6374404" y="708206"/>
-                  </a:lnTo>
-                  <a:lnTo>
-                    <a:pt x="6446027" y="713291"/>
-                  </a:lnTo>
-                  <a:lnTo>
-                    <a:pt x="6517649" y="718329"/>
-                  </a:lnTo>
-                  <a:lnTo>
-                    <a:pt x="6589272" y="723320"/>
-                  </a:lnTo>
-                  <a:lnTo>
-                    <a:pt x="6660894" y="728265"/>
-                  </a:lnTo>
-                  <a:lnTo>
-                    <a:pt x="6732517" y="733163"/>
-                  </a:lnTo>
-                  <a:lnTo>
-                    <a:pt x="6804139" y="738017"/>
-                  </a:lnTo>
-                  <a:lnTo>
-                    <a:pt x="6875762" y="742825"/>
-                  </a:lnTo>
-                  <a:lnTo>
-                    <a:pt x="6947385" y="747589"/>
-                  </a:lnTo>
-                  <a:lnTo>
-                    <a:pt x="7019007" y="752309"/>
-                  </a:lnTo>
-                  <a:lnTo>
-                    <a:pt x="7090630" y="756985"/>
+                    <a:pt x="71622" y="11620"/>
+                  </a:lnTo>
+                  <a:lnTo>
+                    <a:pt x="143245" y="23134"/>
+                  </a:lnTo>
+                  <a:lnTo>
+                    <a:pt x="214867" y="34541"/>
+                  </a:lnTo>
+                  <a:lnTo>
+                    <a:pt x="286490" y="45842"/>
+                  </a:lnTo>
+                  <a:lnTo>
+                    <a:pt x="358112" y="57039"/>
+                  </a:lnTo>
+                  <a:lnTo>
+                    <a:pt x="429735" y="68132"/>
+                  </a:lnTo>
+                  <a:lnTo>
+                    <a:pt x="501357" y="79123"/>
+                  </a:lnTo>
+                  <a:lnTo>
+                    <a:pt x="572980" y="90012"/>
+                  </a:lnTo>
+                  <a:lnTo>
+                    <a:pt x="644602" y="100800"/>
+                  </a:lnTo>
+                  <a:lnTo>
+                    <a:pt x="716225" y="111488"/>
+                  </a:lnTo>
+                  <a:lnTo>
+                    <a:pt x="787847" y="122077"/>
+                  </a:lnTo>
+                  <a:lnTo>
+                    <a:pt x="859470" y="132569"/>
+                  </a:lnTo>
+                  <a:lnTo>
+                    <a:pt x="931092" y="142963"/>
+                  </a:lnTo>
+                  <a:lnTo>
+                    <a:pt x="1002715" y="153261"/>
+                  </a:lnTo>
+                  <a:lnTo>
+                    <a:pt x="1074337" y="163464"/>
+                  </a:lnTo>
+                  <a:lnTo>
+                    <a:pt x="1145960" y="173572"/>
+                  </a:lnTo>
+                  <a:lnTo>
+                    <a:pt x="1217582" y="183587"/>
+                  </a:lnTo>
+                  <a:lnTo>
+                    <a:pt x="1289205" y="193509"/>
+                  </a:lnTo>
+                  <a:lnTo>
+                    <a:pt x="1360827" y="203340"/>
+                  </a:lnTo>
+                  <a:lnTo>
+                    <a:pt x="1432450" y="213079"/>
+                  </a:lnTo>
+                  <a:lnTo>
+                    <a:pt x="1504073" y="222729"/>
+                  </a:lnTo>
+                  <a:lnTo>
+                    <a:pt x="1575695" y="232289"/>
+                  </a:lnTo>
+                  <a:lnTo>
+                    <a:pt x="1647318" y="241760"/>
+                  </a:lnTo>
+                  <a:lnTo>
+                    <a:pt x="1718940" y="251144"/>
+                  </a:lnTo>
+                  <a:lnTo>
+                    <a:pt x="1790563" y="260441"/>
+                  </a:lnTo>
+                  <a:lnTo>
+                    <a:pt x="1862185" y="269652"/>
+                  </a:lnTo>
+                  <a:lnTo>
+                    <a:pt x="1933808" y="278778"/>
+                  </a:lnTo>
+                  <a:lnTo>
+                    <a:pt x="2005430" y="287820"/>
+                  </a:lnTo>
+                  <a:lnTo>
+                    <a:pt x="2077053" y="296777"/>
+                  </a:lnTo>
+                  <a:lnTo>
+                    <a:pt x="2148675" y="305652"/>
+                  </a:lnTo>
+                  <a:lnTo>
+                    <a:pt x="2220298" y="314445"/>
+                  </a:lnTo>
+                  <a:lnTo>
+                    <a:pt x="2291920" y="323156"/>
+                  </a:lnTo>
+                  <a:lnTo>
+                    <a:pt x="2363543" y="331787"/>
+                  </a:lnTo>
+                  <a:lnTo>
+                    <a:pt x="2435165" y="340338"/>
+                  </a:lnTo>
+                  <a:lnTo>
+                    <a:pt x="2506788" y="348810"/>
+                  </a:lnTo>
+                  <a:lnTo>
+                    <a:pt x="2578410" y="357203"/>
+                  </a:lnTo>
+                  <a:lnTo>
+                    <a:pt x="2650033" y="365519"/>
+                  </a:lnTo>
+                  <a:lnTo>
+                    <a:pt x="2721655" y="373758"/>
+                  </a:lnTo>
+                  <a:lnTo>
+                    <a:pt x="2793278" y="381921"/>
+                  </a:lnTo>
+                  <a:lnTo>
+                    <a:pt x="2864901" y="390008"/>
+                  </a:lnTo>
+                  <a:lnTo>
+                    <a:pt x="2936523" y="398020"/>
+                  </a:lnTo>
+                  <a:lnTo>
+                    <a:pt x="3008146" y="405958"/>
+                  </a:lnTo>
+                  <a:lnTo>
+                    <a:pt x="3079768" y="413822"/>
+                  </a:lnTo>
+                  <a:lnTo>
+                    <a:pt x="3151391" y="421614"/>
+                  </a:lnTo>
+                  <a:lnTo>
+                    <a:pt x="3223013" y="429334"/>
+                  </a:lnTo>
+                  <a:lnTo>
+                    <a:pt x="3294636" y="436982"/>
+                  </a:lnTo>
+                  <a:lnTo>
+                    <a:pt x="3366258" y="444560"/>
+                  </a:lnTo>
+                  <a:lnTo>
+                    <a:pt x="3437881" y="452067"/>
+                  </a:lnTo>
+                  <a:lnTo>
+                    <a:pt x="3509503" y="459505"/>
+                  </a:lnTo>
+                  <a:lnTo>
+                    <a:pt x="3581126" y="466875"/>
+                  </a:lnTo>
+                  <a:lnTo>
+                    <a:pt x="3652748" y="474175"/>
+                  </a:lnTo>
+                  <a:lnTo>
+                    <a:pt x="3724371" y="481409"/>
+                  </a:lnTo>
+                  <a:lnTo>
+                    <a:pt x="3795993" y="488575"/>
+                  </a:lnTo>
+                  <a:lnTo>
+                    <a:pt x="3867616" y="495675"/>
+                  </a:lnTo>
+                  <a:lnTo>
+                    <a:pt x="3939238" y="502710"/>
+                  </a:lnTo>
+                  <a:lnTo>
+                    <a:pt x="4010861" y="509679"/>
+                  </a:lnTo>
+                  <a:lnTo>
+                    <a:pt x="4082483" y="516584"/>
+                  </a:lnTo>
+                  <a:lnTo>
+                    <a:pt x="4154106" y="523425"/>
+                  </a:lnTo>
+                  <a:lnTo>
+                    <a:pt x="4225729" y="530203"/>
+                  </a:lnTo>
+                  <a:lnTo>
+                    <a:pt x="4297351" y="536918"/>
+                  </a:lnTo>
+                  <a:lnTo>
+                    <a:pt x="4368974" y="543571"/>
+                  </a:lnTo>
+                  <a:lnTo>
+                    <a:pt x="4440596" y="550162"/>
+                  </a:lnTo>
+                  <a:lnTo>
+                    <a:pt x="4512219" y="556692"/>
+                  </a:lnTo>
+                  <a:lnTo>
+                    <a:pt x="4583841" y="563162"/>
+                  </a:lnTo>
+                  <a:lnTo>
+                    <a:pt x="4655464" y="569572"/>
+                  </a:lnTo>
+                  <a:lnTo>
+                    <a:pt x="4727086" y="575923"/>
+                  </a:lnTo>
+                  <a:lnTo>
+                    <a:pt x="4798709" y="582215"/>
+                  </a:lnTo>
+                  <a:lnTo>
+                    <a:pt x="4870331" y="588449"/>
+                  </a:lnTo>
+                  <a:lnTo>
+                    <a:pt x="4941954" y="594625"/>
+                  </a:lnTo>
+                  <a:lnTo>
+                    <a:pt x="5013576" y="600743"/>
+                  </a:lnTo>
+                  <a:lnTo>
+                    <a:pt x="5085199" y="606806"/>
+                  </a:lnTo>
+                  <a:lnTo>
+                    <a:pt x="5156821" y="612812"/>
+                  </a:lnTo>
+                  <a:lnTo>
+                    <a:pt x="5228444" y="618762"/>
+                  </a:lnTo>
+                  <a:lnTo>
+                    <a:pt x="5300066" y="624658"/>
+                  </a:lnTo>
+                  <a:lnTo>
+                    <a:pt x="5371689" y="630499"/>
+                  </a:lnTo>
+                  <a:lnTo>
+                    <a:pt x="5443311" y="636286"/>
+                  </a:lnTo>
+                  <a:lnTo>
+                    <a:pt x="5514934" y="642019"/>
+                  </a:lnTo>
+                  <a:lnTo>
+                    <a:pt x="5586557" y="647700"/>
+                  </a:lnTo>
+                  <a:lnTo>
+                    <a:pt x="5658179" y="653327"/>
+                  </a:lnTo>
+                  <a:lnTo>
+                    <a:pt x="5729802" y="658903"/>
+                  </a:lnTo>
+                  <a:lnTo>
+                    <a:pt x="5801424" y="664427"/>
+                  </a:lnTo>
+                  <a:lnTo>
+                    <a:pt x="5873047" y="669900"/>
+                  </a:lnTo>
+                  <a:lnTo>
+                    <a:pt x="5944669" y="675323"/>
+                  </a:lnTo>
+                  <a:lnTo>
+                    <a:pt x="6016292" y="680695"/>
+                  </a:lnTo>
+                  <a:lnTo>
+                    <a:pt x="6087914" y="686017"/>
+                  </a:lnTo>
+                  <a:lnTo>
+                    <a:pt x="6159537" y="691291"/>
+                  </a:lnTo>
+                  <a:lnTo>
+                    <a:pt x="6231159" y="696515"/>
+                  </a:lnTo>
+                  <a:lnTo>
+                    <a:pt x="6302782" y="701691"/>
+                  </a:lnTo>
+                  <a:lnTo>
+                    <a:pt x="6374404" y="706819"/>
+                  </a:lnTo>
+                  <a:lnTo>
+                    <a:pt x="6446027" y="711900"/>
+                  </a:lnTo>
+                  <a:lnTo>
+                    <a:pt x="6517649" y="716934"/>
+                  </a:lnTo>
+                  <a:lnTo>
+                    <a:pt x="6589272" y="721921"/>
+                  </a:lnTo>
+                  <a:lnTo>
+                    <a:pt x="6660894" y="726862"/>
+                  </a:lnTo>
+                  <a:lnTo>
+                    <a:pt x="6732517" y="731757"/>
+                  </a:lnTo>
+                  <a:lnTo>
+                    <a:pt x="6804139" y="736607"/>
+                  </a:lnTo>
+                  <a:lnTo>
+                    <a:pt x="6875762" y="741412"/>
+                  </a:lnTo>
+                  <a:lnTo>
+                    <a:pt x="6947385" y="746173"/>
+                  </a:lnTo>
+                  <a:lnTo>
+                    <a:pt x="7019007" y="750890"/>
+                  </a:lnTo>
+                  <a:lnTo>
+                    <a:pt x="7090630" y="755562"/>
                   </a:lnTo>
                 </a:path>
               </a:pathLst>
@@ -4660,7 +4660,7 @@
           </p:nvSpPr>
           <p:spPr>
             <a:xfrm>
-              <a:off x="4363883" y="2073503"/>
+              <a:off x="4368185" y="2073503"/>
               <a:ext cx="0" cy="3649639"/>
             </a:xfrm>
             <a:custGeom>
@@ -4703,7 +4703,7 @@
           </p:nvSpPr>
           <p:spPr>
             <a:xfrm>
-              <a:off x="3178931" y="2073503"/>
+              <a:off x="3176242" y="2073503"/>
               <a:ext cx="0" cy="3649639"/>
             </a:xfrm>
             <a:custGeom>
@@ -4746,7 +4746,7 @@
           </p:nvSpPr>
           <p:spPr>
             <a:xfrm>
-              <a:off x="5373904" y="2073503"/>
+              <a:off x="5386913" y="2073503"/>
               <a:ext cx="0" cy="3649639"/>
             </a:xfrm>
             <a:custGeom>
@@ -5019,7 +5019,7 @@
           </p:nvSpPr>
           <p:spPr>
             <a:xfrm>
-              <a:off x="1536080" y="5785772"/>
+              <a:off x="1536741" y="5785772"/>
               <a:ext cx="161574" cy="80101"/>
             </a:xfrm>
             <a:prstGeom prst="rect">
@@ -5065,7 +5065,7 @@
           </p:nvSpPr>
           <p:spPr>
             <a:xfrm>
-              <a:off x="3342736" y="5785772"/>
+              <a:off x="3341771" y="5785772"/>
               <a:ext cx="161574" cy="80101"/>
             </a:xfrm>
             <a:prstGeom prst="rect">
@@ -5111,7 +5111,7 @@
           </p:nvSpPr>
           <p:spPr>
             <a:xfrm>
-              <a:off x="5199088" y="5785772"/>
+              <a:off x="5196500" y="5785772"/>
               <a:ext cx="62179" cy="80101"/>
             </a:xfrm>
             <a:prstGeom prst="rect">
@@ -5157,7 +5157,7 @@
           </p:nvSpPr>
           <p:spPr>
             <a:xfrm>
-              <a:off x="6974654" y="5785772"/>
+              <a:off x="6970441" y="5785772"/>
               <a:ext cx="124358" cy="80101"/>
             </a:xfrm>
             <a:prstGeom prst="rect">
@@ -5328,7 +5328,7 @@
                   <a:latin typeface="Helvetica"/>
                   <a:cs typeface="Helvetica"/>
                 </a:rPr>
-                <a:t>subHR per 10 % decline: 1.12 (1.01-1.26), p_Bonf = 0.217 (n = 6)  |  per IQR decline (Δ = 24.3 %): 1.33 (1.02-1.74)  |  IQR: [-22.7, 1.6] %</a:t>
+                <a:t>subHR per 10 % decline: 1.12 (1.01-1.26), p_Bonf = 0.231 (n = 6)  |  per IQR decline (Δ = 24.5 %): 1.33 (1.02-1.75)  |  IQR: [-22.7, 1.8] %</a:t>
               </a:r>
             </a:p>
           </p:txBody>
